--- a/slides/Module-04-Algorithmic-Trading-and-Execution.pptx
+++ b/slides/Module-04-Algorithmic-Trading-and-Execution.pptx
@@ -13,8 +13,6 @@
     <p:sldId id="261" r:id="rId12"/>
     <p:sldId id="262" r:id="rId13"/>
     <p:sldId id="263" r:id="rId14"/>
-    <p:sldId id="264" r:id="rId15"/>
-    <p:sldId id="265" r:id="rId16"/>
   </p:sldIdLst>
   <p:sldSz cx="12191695" cy="6858000" type="screen4x3"/>
   <p:notesSz cx="6858000" cy="9144000"/>
@@ -3735,1423 +3733,6 @@
 </p:sld>
 </file>
 
-<file path=ppt/slides/slide10.xml><?xml version="1.0" encoding="utf-8"?>
-<p:sld xmlns:a="http://schemas.openxmlformats.org/drawingml/2006/main" xmlns:p="http://schemas.openxmlformats.org/presentationml/2006/main" xmlns:r="http://schemas.openxmlformats.org/officeDocument/2006/relationships">
-  <p:cSld>
-    <p:bg>
-      <p:bgPr>
-        <a:solidFill>
-          <a:srgbClr val="F7F8FA"/>
-        </a:solidFill>
-        <a:effectLst/>
-      </p:bgPr>
-    </p:bg>
-    <p:spTree>
-      <p:nvGrpSpPr>
-        <p:cNvPr id="1" name=""/>
-        <p:cNvGrpSpPr/>
-        <p:nvPr/>
-      </p:nvGrpSpPr>
-      <p:grpSpPr/>
-      <p:sp>
-        <p:nvSpPr>
-          <p:cNvPr id="2" name="Rectangle 1"/>
-          <p:cNvSpPr/>
-          <p:nvPr/>
-        </p:nvSpPr>
-        <p:spPr>
-          <a:xfrm>
-            <a:off x="548640" y="402336"/>
-            <a:ext cx="118872" cy="118872"/>
-          </a:xfrm>
-          <a:prstGeom prst="rect">
-            <a:avLst/>
-          </a:prstGeom>
-          <a:solidFill>
-            <a:srgbClr val="C9A227"/>
-          </a:solidFill>
-          <a:ln>
-            <a:noFill/>
-          </a:ln>
-          <a:effectLst/>
-        </p:spPr>
-        <p:style>
-          <a:lnRef idx="1">
-            <a:schemeClr val="accent1"/>
-          </a:lnRef>
-          <a:fillRef idx="3">
-            <a:schemeClr val="accent1"/>
-          </a:fillRef>
-          <a:effectRef idx="2">
-            <a:schemeClr val="accent1"/>
-          </a:effectRef>
-          <a:fontRef idx="minor">
-            <a:schemeClr val="lt1"/>
-          </a:fontRef>
-        </p:style>
-        <p:txBody>
-          <a:bodyPr rtlCol="0" anchor="ctr"/>
-          <a:lstStyle/>
-          <a:p>
-            <a:pPr algn="ctr"/>
-          </a:p>
-        </p:txBody>
-      </p:sp>
-      <p:sp>
-        <p:nvSpPr>
-          <p:cNvPr id="3" name="TextBox 2"/>
-          <p:cNvSpPr txBox="1"/>
-          <p:nvPr/>
-        </p:nvSpPr>
-        <p:spPr>
-          <a:xfrm>
-            <a:off x="786384" y="310896"/>
-            <a:ext cx="10817352" cy="274320"/>
-          </a:xfrm>
-          <a:prstGeom prst="rect">
-            <a:avLst/>
-          </a:prstGeom>
-          <a:noFill/>
-        </p:spPr>
-        <p:txBody>
-          <a:bodyPr wrap="square" anchor="t" lIns="0" rIns="0" tIns="0" bIns="0">
-            <a:spAutoFit/>
-          </a:bodyPr>
-          <a:lstStyle/>
-          <a:p>
-            <a:pPr algn="l"/>
-            <a:r>
-              <a:rPr sz="1100" b="1">
-                <a:solidFill>
-                  <a:srgbClr val="C9A227"/>
-                </a:solidFill>
-              </a:rPr>
-              <a:t>PRACTICE QUESTIONS</a:t>
-            </a:r>
-          </a:p>
-        </p:txBody>
-      </p:sp>
-      <p:sp>
-        <p:nvSpPr>
-          <p:cNvPr id="4" name="TextBox 3"/>
-          <p:cNvSpPr txBox="1"/>
-          <p:nvPr/>
-        </p:nvSpPr>
-        <p:spPr>
-          <a:xfrm>
-            <a:off x="548640" y="621792"/>
-            <a:ext cx="11091672" cy="731520"/>
-          </a:xfrm>
-          <a:prstGeom prst="rect">
-            <a:avLst/>
-          </a:prstGeom>
-          <a:noFill/>
-        </p:spPr>
-        <p:txBody>
-          <a:bodyPr wrap="square" anchor="t" lIns="0" rIns="0" tIns="0" bIns="0">
-            <a:spAutoFit/>
-          </a:bodyPr>
-          <a:lstStyle/>
-          <a:p>
-            <a:pPr algn="l"/>
-            <a:r>
-              <a:rPr sz="2900" b="1">
-                <a:solidFill>
-                  <a:srgbClr val="0F2145"/>
-                </a:solidFill>
-                <a:latin typeface="Georgia"/>
-              </a:rPr>
-              <a:t>Six questions before the exam</a:t>
-            </a:r>
-          </a:p>
-        </p:txBody>
-      </p:sp>
-      <p:sp>
-        <p:nvSpPr>
-          <p:cNvPr id="5" name="Rectangle 4"/>
-          <p:cNvSpPr/>
-          <p:nvPr/>
-        </p:nvSpPr>
-        <p:spPr>
-          <a:xfrm>
-            <a:off x="548640" y="1444752"/>
-            <a:ext cx="11091672" cy="676656"/>
-          </a:xfrm>
-          <a:prstGeom prst="rect">
-            <a:avLst/>
-          </a:prstGeom>
-          <a:solidFill>
-            <a:srgbClr val="FFFFFF"/>
-          </a:solidFill>
-          <a:ln>
-            <a:noFill/>
-          </a:ln>
-          <a:effectLst/>
-        </p:spPr>
-        <p:style>
-          <a:lnRef idx="1">
-            <a:schemeClr val="accent1"/>
-          </a:lnRef>
-          <a:fillRef idx="3">
-            <a:schemeClr val="accent1"/>
-          </a:fillRef>
-          <a:effectRef idx="2">
-            <a:schemeClr val="accent1"/>
-          </a:effectRef>
-          <a:fontRef idx="minor">
-            <a:schemeClr val="lt1"/>
-          </a:fontRef>
-        </p:style>
-        <p:txBody>
-          <a:bodyPr rtlCol="0" anchor="ctr"/>
-          <a:lstStyle/>
-          <a:p>
-            <a:pPr algn="ctr"/>
-          </a:p>
-        </p:txBody>
-      </p:sp>
-      <p:sp>
-        <p:nvSpPr>
-          <p:cNvPr id="6" name="Rectangle 5"/>
-          <p:cNvSpPr/>
-          <p:nvPr/>
-        </p:nvSpPr>
-        <p:spPr>
-          <a:xfrm>
-            <a:off x="548640" y="1444752"/>
-            <a:ext cx="64008" cy="676656"/>
-          </a:xfrm>
-          <a:prstGeom prst="rect">
-            <a:avLst/>
-          </a:prstGeom>
-          <a:solidFill>
-            <a:srgbClr val="3A5C9E"/>
-          </a:solidFill>
-          <a:ln>
-            <a:noFill/>
-          </a:ln>
-          <a:effectLst/>
-        </p:spPr>
-        <p:style>
-          <a:lnRef idx="1">
-            <a:schemeClr val="accent1"/>
-          </a:lnRef>
-          <a:fillRef idx="3">
-            <a:schemeClr val="accent1"/>
-          </a:fillRef>
-          <a:effectRef idx="2">
-            <a:schemeClr val="accent1"/>
-          </a:effectRef>
-          <a:fontRef idx="minor">
-            <a:schemeClr val="lt1"/>
-          </a:fontRef>
-        </p:style>
-        <p:txBody>
-          <a:bodyPr rtlCol="0" anchor="ctr"/>
-          <a:lstStyle/>
-          <a:p>
-            <a:pPr algn="ctr"/>
-          </a:p>
-        </p:txBody>
-      </p:sp>
-      <p:sp>
-        <p:nvSpPr>
-          <p:cNvPr id="7" name="TextBox 6"/>
-          <p:cNvSpPr txBox="1"/>
-          <p:nvPr/>
-        </p:nvSpPr>
-        <p:spPr>
-          <a:xfrm>
-            <a:off x="822960" y="1508760"/>
-            <a:ext cx="640080" cy="365760"/>
-          </a:xfrm>
-          <a:prstGeom prst="rect">
-            <a:avLst/>
-          </a:prstGeom>
-          <a:noFill/>
-        </p:spPr>
-        <p:txBody>
-          <a:bodyPr wrap="square" anchor="t" lIns="0" rIns="0" tIns="0" bIns="0">
-            <a:spAutoFit/>
-          </a:bodyPr>
-          <a:lstStyle/>
-          <a:p>
-            <a:pPr algn="l"/>
-            <a:r>
-              <a:rPr sz="1400" b="1">
-                <a:solidFill>
-                  <a:srgbClr val="3A5C9E"/>
-                </a:solidFill>
-                <a:latin typeface="Georgia"/>
-              </a:rPr>
-              <a:t>Q1</a:t>
-            </a:r>
-          </a:p>
-        </p:txBody>
-      </p:sp>
-      <p:sp>
-        <p:nvSpPr>
-          <p:cNvPr id="8" name="TextBox 7"/>
-          <p:cNvSpPr txBox="1"/>
-          <p:nvPr/>
-        </p:nvSpPr>
-        <p:spPr>
-          <a:xfrm>
-            <a:off x="1554480" y="1499616"/>
-            <a:ext cx="9875520" cy="585216"/>
-          </a:xfrm>
-          <a:prstGeom prst="rect">
-            <a:avLst/>
-          </a:prstGeom>
-          <a:noFill/>
-        </p:spPr>
-        <p:txBody>
-          <a:bodyPr wrap="square" anchor="t" lIns="0" rIns="0" tIns="0" bIns="0">
-            <a:spAutoFit/>
-          </a:bodyPr>
-          <a:lstStyle/>
-          <a:p>
-            <a:pPr algn="l"/>
-            <a:r>
-              <a:rPr sz="1050" b="1">
-                <a:solidFill>
-                  <a:srgbClr val="1B2A41"/>
-                </a:solidFill>
-              </a:rPr>
-              <a:t>Reliance shows bid ₹2,950.00 and ask ₹2,950.50. What does a market buy pay, and what does a limit buy at ₹2,950.00 do?</a:t>
-            </a:r>
-          </a:p>
-          <a:p>
-            <a:pPr algn="l">
-              <a:spcBef>
-                <a:spcPts val="200"/>
-              </a:spcBef>
-            </a:pPr>
-            <a:r>
-              <a:rPr sz="900" b="1">
-                <a:solidFill>
-                  <a:srgbClr val="C9A227"/>
-                </a:solidFill>
-              </a:rPr>
-              <a:t>TIP  </a:t>
-            </a:r>
-            <a:r>
-              <a:rPr sz="900" b="0">
-                <a:solidFill>
-                  <a:srgbClr val="5D6B7E"/>
-                </a:solidFill>
-              </a:rPr>
-              <a:t>The market buy pays ₹2,950.50 now. The limit buy waits at ₹2,950.00 and may never fill.</a:t>
-            </a:r>
-          </a:p>
-        </p:txBody>
-      </p:sp>
-      <p:sp>
-        <p:nvSpPr>
-          <p:cNvPr id="9" name="Rectangle 8"/>
-          <p:cNvSpPr/>
-          <p:nvPr/>
-        </p:nvSpPr>
-        <p:spPr>
-          <a:xfrm>
-            <a:off x="548640" y="2176272"/>
-            <a:ext cx="11091672" cy="676656"/>
-          </a:xfrm>
-          <a:prstGeom prst="rect">
-            <a:avLst/>
-          </a:prstGeom>
-          <a:solidFill>
-            <a:srgbClr val="FFFFFF"/>
-          </a:solidFill>
-          <a:ln>
-            <a:noFill/>
-          </a:ln>
-          <a:effectLst/>
-        </p:spPr>
-        <p:style>
-          <a:lnRef idx="1">
-            <a:schemeClr val="accent1"/>
-          </a:lnRef>
-          <a:fillRef idx="3">
-            <a:schemeClr val="accent1"/>
-          </a:fillRef>
-          <a:effectRef idx="2">
-            <a:schemeClr val="accent1"/>
-          </a:effectRef>
-          <a:fontRef idx="minor">
-            <a:schemeClr val="lt1"/>
-          </a:fontRef>
-        </p:style>
-        <p:txBody>
-          <a:bodyPr rtlCol="0" anchor="ctr"/>
-          <a:lstStyle/>
-          <a:p>
-            <a:pPr algn="ctr"/>
-          </a:p>
-        </p:txBody>
-      </p:sp>
-      <p:sp>
-        <p:nvSpPr>
-          <p:cNvPr id="10" name="Rectangle 9"/>
-          <p:cNvSpPr/>
-          <p:nvPr/>
-        </p:nvSpPr>
-        <p:spPr>
-          <a:xfrm>
-            <a:off x="548640" y="2176272"/>
-            <a:ext cx="64008" cy="676656"/>
-          </a:xfrm>
-          <a:prstGeom prst="rect">
-            <a:avLst/>
-          </a:prstGeom>
-          <a:solidFill>
-            <a:srgbClr val="3A5C9E"/>
-          </a:solidFill>
-          <a:ln>
-            <a:noFill/>
-          </a:ln>
-          <a:effectLst/>
-        </p:spPr>
-        <p:style>
-          <a:lnRef idx="1">
-            <a:schemeClr val="accent1"/>
-          </a:lnRef>
-          <a:fillRef idx="3">
-            <a:schemeClr val="accent1"/>
-          </a:fillRef>
-          <a:effectRef idx="2">
-            <a:schemeClr val="accent1"/>
-          </a:effectRef>
-          <a:fontRef idx="minor">
-            <a:schemeClr val="lt1"/>
-          </a:fontRef>
-        </p:style>
-        <p:txBody>
-          <a:bodyPr rtlCol="0" anchor="ctr"/>
-          <a:lstStyle/>
-          <a:p>
-            <a:pPr algn="ctr"/>
-          </a:p>
-        </p:txBody>
-      </p:sp>
-      <p:sp>
-        <p:nvSpPr>
-          <p:cNvPr id="11" name="TextBox 10"/>
-          <p:cNvSpPr txBox="1"/>
-          <p:nvPr/>
-        </p:nvSpPr>
-        <p:spPr>
-          <a:xfrm>
-            <a:off x="822960" y="2240279"/>
-            <a:ext cx="640080" cy="365760"/>
-          </a:xfrm>
-          <a:prstGeom prst="rect">
-            <a:avLst/>
-          </a:prstGeom>
-          <a:noFill/>
-        </p:spPr>
-        <p:txBody>
-          <a:bodyPr wrap="square" anchor="t" lIns="0" rIns="0" tIns="0" bIns="0">
-            <a:spAutoFit/>
-          </a:bodyPr>
-          <a:lstStyle/>
-          <a:p>
-            <a:pPr algn="l"/>
-            <a:r>
-              <a:rPr sz="1400" b="1">
-                <a:solidFill>
-                  <a:srgbClr val="3A5C9E"/>
-                </a:solidFill>
-                <a:latin typeface="Georgia"/>
-              </a:rPr>
-              <a:t>Q2</a:t>
-            </a:r>
-          </a:p>
-        </p:txBody>
-      </p:sp>
-      <p:sp>
-        <p:nvSpPr>
-          <p:cNvPr id="12" name="TextBox 11"/>
-          <p:cNvSpPr txBox="1"/>
-          <p:nvPr/>
-        </p:nvSpPr>
-        <p:spPr>
-          <a:xfrm>
-            <a:off x="1554480" y="2231136"/>
-            <a:ext cx="9875520" cy="585216"/>
-          </a:xfrm>
-          <a:prstGeom prst="rect">
-            <a:avLst/>
-          </a:prstGeom>
-          <a:noFill/>
-        </p:spPr>
-        <p:txBody>
-          <a:bodyPr wrap="square" anchor="t" lIns="0" rIns="0" tIns="0" bIns="0">
-            <a:spAutoFit/>
-          </a:bodyPr>
-          <a:lstStyle/>
-          <a:p>
-            <a:pPr algn="l"/>
-            <a:r>
-              <a:rPr sz="1050" b="1">
-                <a:solidFill>
-                  <a:srgbClr val="1B2A41"/>
-                </a:solidFill>
-              </a:rPr>
-              <a:t>Sort these into momentum, mean reversion or pairs: RSI, Bollinger Bands, cointegration.</a:t>
-            </a:r>
-          </a:p>
-          <a:p>
-            <a:pPr algn="l">
-              <a:spcBef>
-                <a:spcPts val="200"/>
-              </a:spcBef>
-            </a:pPr>
-            <a:r>
-              <a:rPr sz="900" b="1">
-                <a:solidFill>
-                  <a:srgbClr val="C9A227"/>
-                </a:solidFill>
-              </a:rPr>
-              <a:t>TIP  </a:t>
-            </a:r>
-            <a:r>
-              <a:rPr sz="900" b="0">
-                <a:solidFill>
-                  <a:srgbClr val="5D6B7E"/>
-                </a:solidFill>
-              </a:rPr>
-              <a:t>RSI is momentum, Bollinger Bands are mean reversion, cointegration is pairs trading.</a:t>
-            </a:r>
-          </a:p>
-        </p:txBody>
-      </p:sp>
-      <p:sp>
-        <p:nvSpPr>
-          <p:cNvPr id="13" name="Rectangle 12"/>
-          <p:cNvSpPr/>
-          <p:nvPr/>
-        </p:nvSpPr>
-        <p:spPr>
-          <a:xfrm>
-            <a:off x="548640" y="2907791"/>
-            <a:ext cx="11091672" cy="676656"/>
-          </a:xfrm>
-          <a:prstGeom prst="rect">
-            <a:avLst/>
-          </a:prstGeom>
-          <a:solidFill>
-            <a:srgbClr val="FFFFFF"/>
-          </a:solidFill>
-          <a:ln>
-            <a:noFill/>
-          </a:ln>
-          <a:effectLst/>
-        </p:spPr>
-        <p:style>
-          <a:lnRef idx="1">
-            <a:schemeClr val="accent1"/>
-          </a:lnRef>
-          <a:fillRef idx="3">
-            <a:schemeClr val="accent1"/>
-          </a:fillRef>
-          <a:effectRef idx="2">
-            <a:schemeClr val="accent1"/>
-          </a:effectRef>
-          <a:fontRef idx="minor">
-            <a:schemeClr val="lt1"/>
-          </a:fontRef>
-        </p:style>
-        <p:txBody>
-          <a:bodyPr rtlCol="0" anchor="ctr"/>
-          <a:lstStyle/>
-          <a:p>
-            <a:pPr algn="ctr"/>
-          </a:p>
-        </p:txBody>
-      </p:sp>
-      <p:sp>
-        <p:nvSpPr>
-          <p:cNvPr id="14" name="Rectangle 13"/>
-          <p:cNvSpPr/>
-          <p:nvPr/>
-        </p:nvSpPr>
-        <p:spPr>
-          <a:xfrm>
-            <a:off x="548640" y="2907791"/>
-            <a:ext cx="64008" cy="676656"/>
-          </a:xfrm>
-          <a:prstGeom prst="rect">
-            <a:avLst/>
-          </a:prstGeom>
-          <a:solidFill>
-            <a:srgbClr val="3A5C9E"/>
-          </a:solidFill>
-          <a:ln>
-            <a:noFill/>
-          </a:ln>
-          <a:effectLst/>
-        </p:spPr>
-        <p:style>
-          <a:lnRef idx="1">
-            <a:schemeClr val="accent1"/>
-          </a:lnRef>
-          <a:fillRef idx="3">
-            <a:schemeClr val="accent1"/>
-          </a:fillRef>
-          <a:effectRef idx="2">
-            <a:schemeClr val="accent1"/>
-          </a:effectRef>
-          <a:fontRef idx="minor">
-            <a:schemeClr val="lt1"/>
-          </a:fontRef>
-        </p:style>
-        <p:txBody>
-          <a:bodyPr rtlCol="0" anchor="ctr"/>
-          <a:lstStyle/>
-          <a:p>
-            <a:pPr algn="ctr"/>
-          </a:p>
-        </p:txBody>
-      </p:sp>
-      <p:sp>
-        <p:nvSpPr>
-          <p:cNvPr id="15" name="TextBox 14"/>
-          <p:cNvSpPr txBox="1"/>
-          <p:nvPr/>
-        </p:nvSpPr>
-        <p:spPr>
-          <a:xfrm>
-            <a:off x="822960" y="2971799"/>
-            <a:ext cx="640080" cy="365760"/>
-          </a:xfrm>
-          <a:prstGeom prst="rect">
-            <a:avLst/>
-          </a:prstGeom>
-          <a:noFill/>
-        </p:spPr>
-        <p:txBody>
-          <a:bodyPr wrap="square" anchor="t" lIns="0" rIns="0" tIns="0" bIns="0">
-            <a:spAutoFit/>
-          </a:bodyPr>
-          <a:lstStyle/>
-          <a:p>
-            <a:pPr algn="l"/>
-            <a:r>
-              <a:rPr sz="1400" b="1">
-                <a:solidFill>
-                  <a:srgbClr val="3A5C9E"/>
-                </a:solidFill>
-                <a:latin typeface="Georgia"/>
-              </a:rPr>
-              <a:t>Q3</a:t>
-            </a:r>
-          </a:p>
-        </p:txBody>
-      </p:sp>
-      <p:sp>
-        <p:nvSpPr>
-          <p:cNvPr id="16" name="TextBox 15"/>
-          <p:cNvSpPr txBox="1"/>
-          <p:nvPr/>
-        </p:nvSpPr>
-        <p:spPr>
-          <a:xfrm>
-            <a:off x="1554480" y="2962656"/>
-            <a:ext cx="9875520" cy="585216"/>
-          </a:xfrm>
-          <a:prstGeom prst="rect">
-            <a:avLst/>
-          </a:prstGeom>
-          <a:noFill/>
-        </p:spPr>
-        <p:txBody>
-          <a:bodyPr wrap="square" anchor="t" lIns="0" rIns="0" tIns="0" bIns="0">
-            <a:spAutoFit/>
-          </a:bodyPr>
-          <a:lstStyle/>
-          <a:p>
-            <a:pPr algn="l"/>
-            <a:r>
-              <a:rPr sz="1050" b="1">
-                <a:solidFill>
-                  <a:srgbClr val="1B2A41"/>
-                </a:solidFill>
-              </a:rPr>
-              <a:t>Write a trading bot as a goal plus a loop for a 20-day breakout rule.</a:t>
-            </a:r>
-          </a:p>
-          <a:p>
-            <a:pPr algn="l">
-              <a:spcBef>
-                <a:spcPts val="200"/>
-              </a:spcBef>
-            </a:pPr>
-            <a:r>
-              <a:rPr sz="900" b="1">
-                <a:solidFill>
-                  <a:srgbClr val="C9A227"/>
-                </a:solidFill>
-              </a:rPr>
-              <a:t>TIP  </a:t>
-            </a:r>
-            <a:r>
-              <a:rPr sz="900" b="0">
-                <a:solidFill>
-                  <a:srgbClr val="5D6B7E"/>
-                </a:solidFill>
-              </a:rPr>
-              <a:t>Goal: buy above the 20-day high, sell at +2% or −1%. Loop: each day fetch the close, check the rule, act, log, repeat.</a:t>
-            </a:r>
-          </a:p>
-        </p:txBody>
-      </p:sp>
-      <p:sp>
-        <p:nvSpPr>
-          <p:cNvPr id="17" name="Rectangle 16"/>
-          <p:cNvSpPr/>
-          <p:nvPr/>
-        </p:nvSpPr>
-        <p:spPr>
-          <a:xfrm>
-            <a:off x="548640" y="3639311"/>
-            <a:ext cx="11091672" cy="676656"/>
-          </a:xfrm>
-          <a:prstGeom prst="rect">
-            <a:avLst/>
-          </a:prstGeom>
-          <a:solidFill>
-            <a:srgbClr val="FFFFFF"/>
-          </a:solidFill>
-          <a:ln>
-            <a:noFill/>
-          </a:ln>
-          <a:effectLst/>
-        </p:spPr>
-        <p:style>
-          <a:lnRef idx="1">
-            <a:schemeClr val="accent1"/>
-          </a:lnRef>
-          <a:fillRef idx="3">
-            <a:schemeClr val="accent1"/>
-          </a:fillRef>
-          <a:effectRef idx="2">
-            <a:schemeClr val="accent1"/>
-          </a:effectRef>
-          <a:fontRef idx="minor">
-            <a:schemeClr val="lt1"/>
-          </a:fontRef>
-        </p:style>
-        <p:txBody>
-          <a:bodyPr rtlCol="0" anchor="ctr"/>
-          <a:lstStyle/>
-          <a:p>
-            <a:pPr algn="ctr"/>
-          </a:p>
-        </p:txBody>
-      </p:sp>
-      <p:sp>
-        <p:nvSpPr>
-          <p:cNvPr id="18" name="Rectangle 17"/>
-          <p:cNvSpPr/>
-          <p:nvPr/>
-        </p:nvSpPr>
-        <p:spPr>
-          <a:xfrm>
-            <a:off x="548640" y="3639311"/>
-            <a:ext cx="64008" cy="676656"/>
-          </a:xfrm>
-          <a:prstGeom prst="rect">
-            <a:avLst/>
-          </a:prstGeom>
-          <a:solidFill>
-            <a:srgbClr val="3A5C9E"/>
-          </a:solidFill>
-          <a:ln>
-            <a:noFill/>
-          </a:ln>
-          <a:effectLst/>
-        </p:spPr>
-        <p:style>
-          <a:lnRef idx="1">
-            <a:schemeClr val="accent1"/>
-          </a:lnRef>
-          <a:fillRef idx="3">
-            <a:schemeClr val="accent1"/>
-          </a:fillRef>
-          <a:effectRef idx="2">
-            <a:schemeClr val="accent1"/>
-          </a:effectRef>
-          <a:fontRef idx="minor">
-            <a:schemeClr val="lt1"/>
-          </a:fontRef>
-        </p:style>
-        <p:txBody>
-          <a:bodyPr rtlCol="0" anchor="ctr"/>
-          <a:lstStyle/>
-          <a:p>
-            <a:pPr algn="ctr"/>
-          </a:p>
-        </p:txBody>
-      </p:sp>
-      <p:sp>
-        <p:nvSpPr>
-          <p:cNvPr id="19" name="TextBox 18"/>
-          <p:cNvSpPr txBox="1"/>
-          <p:nvPr/>
-        </p:nvSpPr>
-        <p:spPr>
-          <a:xfrm>
-            <a:off x="822960" y="3703320"/>
-            <a:ext cx="640080" cy="365760"/>
-          </a:xfrm>
-          <a:prstGeom prst="rect">
-            <a:avLst/>
-          </a:prstGeom>
-          <a:noFill/>
-        </p:spPr>
-        <p:txBody>
-          <a:bodyPr wrap="square" anchor="t" lIns="0" rIns="0" tIns="0" bIns="0">
-            <a:spAutoFit/>
-          </a:bodyPr>
-          <a:lstStyle/>
-          <a:p>
-            <a:pPr algn="l"/>
-            <a:r>
-              <a:rPr sz="1400" b="1">
-                <a:solidFill>
-                  <a:srgbClr val="3A5C9E"/>
-                </a:solidFill>
-                <a:latin typeface="Georgia"/>
-              </a:rPr>
-              <a:t>Q4</a:t>
-            </a:r>
-          </a:p>
-        </p:txBody>
-      </p:sp>
-      <p:sp>
-        <p:nvSpPr>
-          <p:cNvPr id="20" name="TextBox 19"/>
-          <p:cNvSpPr txBox="1"/>
-          <p:nvPr/>
-        </p:nvSpPr>
-        <p:spPr>
-          <a:xfrm>
-            <a:off x="1554480" y="3694175"/>
-            <a:ext cx="9875520" cy="585216"/>
-          </a:xfrm>
-          <a:prstGeom prst="rect">
-            <a:avLst/>
-          </a:prstGeom>
-          <a:noFill/>
-        </p:spPr>
-        <p:txBody>
-          <a:bodyPr wrap="square" anchor="t" lIns="0" rIns="0" tIns="0" bIns="0">
-            <a:spAutoFit/>
-          </a:bodyPr>
-          <a:lstStyle/>
-          <a:p>
-            <a:pPr algn="l"/>
-            <a:r>
-              <a:rPr sz="1050" b="1">
-                <a:solidFill>
-                  <a:srgbClr val="1B2A41"/>
-                </a:solidFill>
-              </a:rPr>
-              <a:t>A rule wins 80% in-sample and 55% out-of-sample. What happened, and what do you report?</a:t>
-            </a:r>
-          </a:p>
-          <a:p>
-            <a:pPr algn="l">
-              <a:spcBef>
-                <a:spcPts val="200"/>
-              </a:spcBef>
-            </a:pPr>
-            <a:r>
-              <a:rPr sz="900" b="1">
-                <a:solidFill>
-                  <a:srgbClr val="C9A227"/>
-                </a:solidFill>
-              </a:rPr>
-              <a:t>TIP  </a:t>
-            </a:r>
-            <a:r>
-              <a:rPr sz="900" b="0">
-                <a:solidFill>
-                  <a:srgbClr val="5D6B7E"/>
-                </a:solidFill>
-              </a:rPr>
-              <a:t>It was overfitted. Report the out-of-sample number, the costs and the drawdown, and do not trade it yet.</a:t>
-            </a:r>
-          </a:p>
-        </p:txBody>
-      </p:sp>
-      <p:sp>
-        <p:nvSpPr>
-          <p:cNvPr id="21" name="Rectangle 20"/>
-          <p:cNvSpPr/>
-          <p:nvPr/>
-        </p:nvSpPr>
-        <p:spPr>
-          <a:xfrm>
-            <a:off x="548640" y="4370831"/>
-            <a:ext cx="11091672" cy="676656"/>
-          </a:xfrm>
-          <a:prstGeom prst="rect">
-            <a:avLst/>
-          </a:prstGeom>
-          <a:solidFill>
-            <a:srgbClr val="FFFFFF"/>
-          </a:solidFill>
-          <a:ln>
-            <a:noFill/>
-          </a:ln>
-          <a:effectLst/>
-        </p:spPr>
-        <p:style>
-          <a:lnRef idx="1">
-            <a:schemeClr val="accent1"/>
-          </a:lnRef>
-          <a:fillRef idx="3">
-            <a:schemeClr val="accent1"/>
-          </a:fillRef>
-          <a:effectRef idx="2">
-            <a:schemeClr val="accent1"/>
-          </a:effectRef>
-          <a:fontRef idx="minor">
-            <a:schemeClr val="lt1"/>
-          </a:fontRef>
-        </p:style>
-        <p:txBody>
-          <a:bodyPr rtlCol="0" anchor="ctr"/>
-          <a:lstStyle/>
-          <a:p>
-            <a:pPr algn="ctr"/>
-          </a:p>
-        </p:txBody>
-      </p:sp>
-      <p:sp>
-        <p:nvSpPr>
-          <p:cNvPr id="22" name="Rectangle 21"/>
-          <p:cNvSpPr/>
-          <p:nvPr/>
-        </p:nvSpPr>
-        <p:spPr>
-          <a:xfrm>
-            <a:off x="548640" y="4370831"/>
-            <a:ext cx="64008" cy="676656"/>
-          </a:xfrm>
-          <a:prstGeom prst="rect">
-            <a:avLst/>
-          </a:prstGeom>
-          <a:solidFill>
-            <a:srgbClr val="3A5C9E"/>
-          </a:solidFill>
-          <a:ln>
-            <a:noFill/>
-          </a:ln>
-          <a:effectLst/>
-        </p:spPr>
-        <p:style>
-          <a:lnRef idx="1">
-            <a:schemeClr val="accent1"/>
-          </a:lnRef>
-          <a:fillRef idx="3">
-            <a:schemeClr val="accent1"/>
-          </a:fillRef>
-          <a:effectRef idx="2">
-            <a:schemeClr val="accent1"/>
-          </a:effectRef>
-          <a:fontRef idx="minor">
-            <a:schemeClr val="lt1"/>
-          </a:fontRef>
-        </p:style>
-        <p:txBody>
-          <a:bodyPr rtlCol="0" anchor="ctr"/>
-          <a:lstStyle/>
-          <a:p>
-            <a:pPr algn="ctr"/>
-          </a:p>
-        </p:txBody>
-      </p:sp>
-      <p:sp>
-        <p:nvSpPr>
-          <p:cNvPr id="23" name="TextBox 22"/>
-          <p:cNvSpPr txBox="1"/>
-          <p:nvPr/>
-        </p:nvSpPr>
-        <p:spPr>
-          <a:xfrm>
-            <a:off x="822960" y="4434840"/>
-            <a:ext cx="640080" cy="365760"/>
-          </a:xfrm>
-          <a:prstGeom prst="rect">
-            <a:avLst/>
-          </a:prstGeom>
-          <a:noFill/>
-        </p:spPr>
-        <p:txBody>
-          <a:bodyPr wrap="square" anchor="t" lIns="0" rIns="0" tIns="0" bIns="0">
-            <a:spAutoFit/>
-          </a:bodyPr>
-          <a:lstStyle/>
-          <a:p>
-            <a:pPr algn="l"/>
-            <a:r>
-              <a:rPr sz="1400" b="1">
-                <a:solidFill>
-                  <a:srgbClr val="3A5C9E"/>
-                </a:solidFill>
-                <a:latin typeface="Georgia"/>
-              </a:rPr>
-              <a:t>Q5</a:t>
-            </a:r>
-          </a:p>
-        </p:txBody>
-      </p:sp>
-      <p:sp>
-        <p:nvSpPr>
-          <p:cNvPr id="24" name="TextBox 23"/>
-          <p:cNvSpPr txBox="1"/>
-          <p:nvPr/>
-        </p:nvSpPr>
-        <p:spPr>
-          <a:xfrm>
-            <a:off x="1554480" y="4425695"/>
-            <a:ext cx="9875520" cy="585216"/>
-          </a:xfrm>
-          <a:prstGeom prst="rect">
-            <a:avLst/>
-          </a:prstGeom>
-          <a:noFill/>
-        </p:spPr>
-        <p:txBody>
-          <a:bodyPr wrap="square" anchor="t" lIns="0" rIns="0" tIns="0" bIns="0">
-            <a:spAutoFit/>
-          </a:bodyPr>
-          <a:lstStyle/>
-          <a:p>
-            <a:pPr algn="l"/>
-            <a:r>
-              <a:rPr sz="1050" b="1">
-                <a:solidFill>
-                  <a:srgbClr val="1B2A41"/>
-                </a:solidFill>
-              </a:rPr>
-              <a:t>Two rules both earn 18% a year. One had a 12% max drawdown, the other 40%. Which would you hold, and which number tells you?</a:t>
-            </a:r>
-          </a:p>
-          <a:p>
-            <a:pPr algn="l">
-              <a:spcBef>
-                <a:spcPts val="200"/>
-              </a:spcBef>
-            </a:pPr>
-            <a:r>
-              <a:rPr sz="900" b="1">
-                <a:solidFill>
-                  <a:srgbClr val="C9A227"/>
-                </a:solidFill>
-              </a:rPr>
-              <a:t>TIP  </a:t>
-            </a:r>
-            <a:r>
-              <a:rPr sz="900" b="0">
-                <a:solidFill>
-                  <a:srgbClr val="5D6B7E"/>
-                </a:solidFill>
-              </a:rPr>
-              <a:t>The 12% one. Max drawdown is the worst fall an investor has to sit through: same return, a third of the pain.</a:t>
-            </a:r>
-          </a:p>
-        </p:txBody>
-      </p:sp>
-      <p:sp>
-        <p:nvSpPr>
-          <p:cNvPr id="25" name="Rectangle 24"/>
-          <p:cNvSpPr/>
-          <p:nvPr/>
-        </p:nvSpPr>
-        <p:spPr>
-          <a:xfrm>
-            <a:off x="548640" y="5102351"/>
-            <a:ext cx="11091672" cy="676656"/>
-          </a:xfrm>
-          <a:prstGeom prst="rect">
-            <a:avLst/>
-          </a:prstGeom>
-          <a:solidFill>
-            <a:srgbClr val="FFFFFF"/>
-          </a:solidFill>
-          <a:ln>
-            <a:noFill/>
-          </a:ln>
-          <a:effectLst/>
-        </p:spPr>
-        <p:style>
-          <a:lnRef idx="1">
-            <a:schemeClr val="accent1"/>
-          </a:lnRef>
-          <a:fillRef idx="3">
-            <a:schemeClr val="accent1"/>
-          </a:fillRef>
-          <a:effectRef idx="2">
-            <a:schemeClr val="accent1"/>
-          </a:effectRef>
-          <a:fontRef idx="minor">
-            <a:schemeClr val="lt1"/>
-          </a:fontRef>
-        </p:style>
-        <p:txBody>
-          <a:bodyPr rtlCol="0" anchor="ctr"/>
-          <a:lstStyle/>
-          <a:p>
-            <a:pPr algn="ctr"/>
-          </a:p>
-        </p:txBody>
-      </p:sp>
-      <p:sp>
-        <p:nvSpPr>
-          <p:cNvPr id="26" name="Rectangle 25"/>
-          <p:cNvSpPr/>
-          <p:nvPr/>
-        </p:nvSpPr>
-        <p:spPr>
-          <a:xfrm>
-            <a:off x="548640" y="5102351"/>
-            <a:ext cx="64008" cy="676656"/>
-          </a:xfrm>
-          <a:prstGeom prst="rect">
-            <a:avLst/>
-          </a:prstGeom>
-          <a:solidFill>
-            <a:srgbClr val="3A5C9E"/>
-          </a:solidFill>
-          <a:ln>
-            <a:noFill/>
-          </a:ln>
-          <a:effectLst/>
-        </p:spPr>
-        <p:style>
-          <a:lnRef idx="1">
-            <a:schemeClr val="accent1"/>
-          </a:lnRef>
-          <a:fillRef idx="3">
-            <a:schemeClr val="accent1"/>
-          </a:fillRef>
-          <a:effectRef idx="2">
-            <a:schemeClr val="accent1"/>
-          </a:effectRef>
-          <a:fontRef idx="minor">
-            <a:schemeClr val="lt1"/>
-          </a:fontRef>
-        </p:style>
-        <p:txBody>
-          <a:bodyPr rtlCol="0" anchor="ctr"/>
-          <a:lstStyle/>
-          <a:p>
-            <a:pPr algn="ctr"/>
-          </a:p>
-        </p:txBody>
-      </p:sp>
-      <p:sp>
-        <p:nvSpPr>
-          <p:cNvPr id="27" name="TextBox 26"/>
-          <p:cNvSpPr txBox="1"/>
-          <p:nvPr/>
-        </p:nvSpPr>
-        <p:spPr>
-          <a:xfrm>
-            <a:off x="822960" y="5166359"/>
-            <a:ext cx="640080" cy="365760"/>
-          </a:xfrm>
-          <a:prstGeom prst="rect">
-            <a:avLst/>
-          </a:prstGeom>
-          <a:noFill/>
-        </p:spPr>
-        <p:txBody>
-          <a:bodyPr wrap="square" anchor="t" lIns="0" rIns="0" tIns="0" bIns="0">
-            <a:spAutoFit/>
-          </a:bodyPr>
-          <a:lstStyle/>
-          <a:p>
-            <a:pPr algn="l"/>
-            <a:r>
-              <a:rPr sz="1400" b="1">
-                <a:solidFill>
-                  <a:srgbClr val="3A5C9E"/>
-                </a:solidFill>
-                <a:latin typeface="Georgia"/>
-              </a:rPr>
-              <a:t>Q6</a:t>
-            </a:r>
-          </a:p>
-        </p:txBody>
-      </p:sp>
-      <p:sp>
-        <p:nvSpPr>
-          <p:cNvPr id="28" name="TextBox 27"/>
-          <p:cNvSpPr txBox="1"/>
-          <p:nvPr/>
-        </p:nvSpPr>
-        <p:spPr>
-          <a:xfrm>
-            <a:off x="1554480" y="5157215"/>
-            <a:ext cx="9875520" cy="585216"/>
-          </a:xfrm>
-          <a:prstGeom prst="rect">
-            <a:avLst/>
-          </a:prstGeom>
-          <a:noFill/>
-        </p:spPr>
-        <p:txBody>
-          <a:bodyPr wrap="square" anchor="t" lIns="0" rIns="0" tIns="0" bIns="0">
-            <a:spAutoFit/>
-          </a:bodyPr>
-          <a:lstStyle/>
-          <a:p>
-            <a:pPr algn="l"/>
-            <a:r>
-              <a:rPr sz="1050" b="1">
-                <a:solidFill>
-                  <a:srgbClr val="1B2A41"/>
-                </a:solidFill>
-              </a:rPr>
-              <a:t>What did Knight Capital's failure teach about deploying a bot, and what one control would have saved it?</a:t>
-            </a:r>
-          </a:p>
-          <a:p>
-            <a:pPr algn="l">
-              <a:spcBef>
-                <a:spcPts val="200"/>
-              </a:spcBef>
-            </a:pPr>
-            <a:r>
-              <a:rPr sz="900" b="1">
-                <a:solidFill>
-                  <a:srgbClr val="C9A227"/>
-                </a:solidFill>
-              </a:rPr>
-              <a:t>TIP  </a:t>
-            </a:r>
-            <a:r>
-              <a:rPr sz="900" b="0">
-                <a:solidFill>
-                  <a:srgbClr val="5D6B7E"/>
-                </a:solidFill>
-              </a:rPr>
-              <a:t>The bug was a bad deploy on one server, not the strategy. A kill switch that a human can reach within minutes.</a:t>
-            </a:r>
-          </a:p>
-        </p:txBody>
-      </p:sp>
-      <p:sp>
-        <p:nvSpPr>
-          <p:cNvPr id="29" name="Rectangle 28"/>
-          <p:cNvSpPr/>
-          <p:nvPr/>
-        </p:nvSpPr>
-        <p:spPr>
-          <a:xfrm>
-            <a:off x="548640" y="5870448"/>
-            <a:ext cx="11091672" cy="512064"/>
-          </a:xfrm>
-          <a:prstGeom prst="rect">
-            <a:avLst/>
-          </a:prstGeom>
-          <a:solidFill>
-            <a:srgbClr val="0F2145"/>
-          </a:solidFill>
-          <a:ln>
-            <a:noFill/>
-          </a:ln>
-          <a:effectLst/>
-        </p:spPr>
-        <p:style>
-          <a:lnRef idx="1">
-            <a:schemeClr val="accent1"/>
-          </a:lnRef>
-          <a:fillRef idx="3">
-            <a:schemeClr val="accent1"/>
-          </a:fillRef>
-          <a:effectRef idx="2">
-            <a:schemeClr val="accent1"/>
-          </a:effectRef>
-          <a:fontRef idx="minor">
-            <a:schemeClr val="lt1"/>
-          </a:fontRef>
-        </p:style>
-        <p:txBody>
-          <a:bodyPr rtlCol="0" anchor="ctr"/>
-          <a:lstStyle/>
-          <a:p>
-            <a:pPr algn="ctr"/>
-          </a:p>
-        </p:txBody>
-      </p:sp>
-      <p:sp>
-        <p:nvSpPr>
-          <p:cNvPr id="30" name="Rectangle 29"/>
-          <p:cNvSpPr/>
-          <p:nvPr/>
-        </p:nvSpPr>
-        <p:spPr>
-          <a:xfrm>
-            <a:off x="548640" y="5870448"/>
-            <a:ext cx="64008" cy="512064"/>
-          </a:xfrm>
-          <a:prstGeom prst="rect">
-            <a:avLst/>
-          </a:prstGeom>
-          <a:solidFill>
-            <a:srgbClr val="C9A227"/>
-          </a:solidFill>
-          <a:ln>
-            <a:noFill/>
-          </a:ln>
-          <a:effectLst/>
-        </p:spPr>
-        <p:style>
-          <a:lnRef idx="1">
-            <a:schemeClr val="accent1"/>
-          </a:lnRef>
-          <a:fillRef idx="3">
-            <a:schemeClr val="accent1"/>
-          </a:fillRef>
-          <a:effectRef idx="2">
-            <a:schemeClr val="accent1"/>
-          </a:effectRef>
-          <a:fontRef idx="minor">
-            <a:schemeClr val="lt1"/>
-          </a:fontRef>
-        </p:style>
-        <p:txBody>
-          <a:bodyPr rtlCol="0" anchor="ctr"/>
-          <a:lstStyle/>
-          <a:p>
-            <a:pPr algn="ctr"/>
-          </a:p>
-        </p:txBody>
-      </p:sp>
-      <p:sp>
-        <p:nvSpPr>
-          <p:cNvPr id="31" name="TextBox 30"/>
-          <p:cNvSpPr txBox="1"/>
-          <p:nvPr/>
-        </p:nvSpPr>
-        <p:spPr>
-          <a:xfrm>
-            <a:off x="822960" y="5870448"/>
-            <a:ext cx="10515600" cy="512064"/>
-          </a:xfrm>
-          <a:prstGeom prst="rect">
-            <a:avLst/>
-          </a:prstGeom>
-          <a:noFill/>
-        </p:spPr>
-        <p:txBody>
-          <a:bodyPr wrap="square" anchor="ctr" lIns="0" rIns="0" tIns="0" bIns="0">
-            <a:spAutoFit/>
-          </a:bodyPr>
-          <a:lstStyle/>
-          <a:p>
-            <a:pPr algn="l"/>
-            <a:r>
-              <a:rPr sz="1100" b="1">
-                <a:solidFill>
-                  <a:srgbClr val="C9A227"/>
-                </a:solidFill>
-              </a:rPr>
-              <a:t>Before Session 5:  </a:t>
-            </a:r>
-            <a:r>
-              <a:rPr sz="1100" b="0">
-                <a:solidFill>
-                  <a:srgbClr val="FFFFFF"/>
-                </a:solidFill>
-              </a:rPr>
-              <a:t>write one trading rule in one sentence, and list the three numbers you would need before you trust it.</a:t>
-            </a:r>
-          </a:p>
-        </p:txBody>
-      </p:sp>
-      <p:sp>
-        <p:nvSpPr>
-          <p:cNvPr id="32" name="TextBox 31"/>
-          <p:cNvSpPr txBox="1"/>
-          <p:nvPr/>
-        </p:nvSpPr>
-        <p:spPr>
-          <a:xfrm>
-            <a:off x="548640" y="6473952"/>
-            <a:ext cx="8229600" cy="228600"/>
-          </a:xfrm>
-          <a:prstGeom prst="rect">
-            <a:avLst/>
-          </a:prstGeom>
-          <a:noFill/>
-        </p:spPr>
-        <p:txBody>
-          <a:bodyPr wrap="square" anchor="t" lIns="0" rIns="0" tIns="0" bIns="0">
-            <a:spAutoFit/>
-          </a:bodyPr>
-          <a:lstStyle/>
-          <a:p>
-            <a:pPr algn="l"/>
-            <a:r>
-              <a:rPr sz="800" b="0">
-                <a:solidFill>
-                  <a:srgbClr val="5D6B7E"/>
-                </a:solidFill>
-              </a:rPr>
-              <a:t>The tip is the shape of the answer, not the whole answer. Two or three sentences each in the exam.</a:t>
-            </a:r>
-          </a:p>
-        </p:txBody>
-      </p:sp>
-      <p:sp>
-        <p:nvSpPr>
-          <p:cNvPr id="33" name="TextBox 32"/>
-          <p:cNvSpPr txBox="1"/>
-          <p:nvPr/>
-        </p:nvSpPr>
-        <p:spPr>
-          <a:xfrm>
-            <a:off x="9262872" y="6473952"/>
-            <a:ext cx="2377440" cy="228600"/>
-          </a:xfrm>
-          <a:prstGeom prst="rect">
-            <a:avLst/>
-          </a:prstGeom>
-          <a:noFill/>
-        </p:spPr>
-        <p:txBody>
-          <a:bodyPr wrap="square" anchor="t" lIns="0" rIns="0" tIns="0" bIns="0">
-            <a:spAutoFit/>
-          </a:bodyPr>
-          <a:lstStyle/>
-          <a:p>
-            <a:pPr algn="r"/>
-            <a:r>
-              <a:rPr sz="800" b="0">
-                <a:solidFill>
-                  <a:srgbClr val="5D6B7E"/>
-                </a:solidFill>
-              </a:rPr>
-              <a:t>MODULE 4  ·  10</a:t>
-            </a:r>
-          </a:p>
-        </p:txBody>
-      </p:sp>
-    </p:spTree>
-  </p:cSld>
-  <p:clrMapOvr>
-    <a:masterClrMapping/>
-  </p:clrMapOvr>
-</p:sld>
-</file>
-
 <file path=ppt/slides/slide2.xml><?xml version="1.0" encoding="utf-8"?>
 <p:sld xmlns:a="http://schemas.openxmlformats.org/drawingml/2006/main" xmlns:p="http://schemas.openxmlformats.org/presentationml/2006/main" xmlns:r="http://schemas.openxmlformats.org/officeDocument/2006/relationships">
   <p:cSld>
@@ -5848,7 +4429,7 @@
                   <a:srgbClr val="1B2A41"/>
                 </a:solidFill>
               </a:rPr>
-              <a:t>Case: Knight Capital lost $440M in 45 minutes</a:t>
+              <a:t>Costs, overfitting and data snooping</a:t>
             </a:r>
           </a:p>
         </p:txBody>
@@ -5890,7 +4471,7 @@
                   <a:srgbClr val="1B2A41"/>
                 </a:solidFill>
               </a:rPr>
-              <a:t>Live: Saavi, a VWAP test, the Upstox API, TradingView</a:t>
+              <a:t>Case: Knight Capital lost $440M in 45 minutes</a:t>
             </a:r>
           </a:p>
         </p:txBody>
@@ -6070,7 +4651,7 @@
                   <a:srgbClr val="1B2A41"/>
                 </a:solidFill>
               </a:rPr>
-              <a:t>One momentum bot on an NSE stock</a:t>
+              <a:t>One sentence into Codex: momentum on NIFTY 50</a:t>
             </a:r>
           </a:p>
         </p:txBody>
@@ -6112,7 +4693,7 @@
                   <a:srgbClr val="1B2A41"/>
                 </a:solidFill>
               </a:rPr>
-              <a:t>Two years of data, one performance report</a:t>
+              <a:t>Two years of test data, 12 months of signal</a:t>
             </a:r>
           </a:p>
         </p:txBody>
@@ -6154,7 +4735,7 @@
                   <a:srgbClr val="1B2A41"/>
                 </a:solidFill>
               </a:rPr>
-              <a:t>Peer review: read each other's numbers</a:t>
+              <a:t>Read the monthly table against the 5% target</a:t>
             </a:r>
           </a:p>
         </p:txBody>
@@ -6196,7 +4777,7 @@
                   <a:srgbClr val="1B2A41"/>
                 </a:solidFill>
               </a:rPr>
-              <a:t>Free route at home: Google Colab, no API key</a:t>
+              <a:t>Costs at 25, 50 and 100 bps, live in class</a:t>
             </a:r>
           </a:p>
         </p:txBody>
@@ -12312,7 +10893,7 @@
                   <a:srgbClr val="C9A227"/>
                 </a:solidFill>
               </a:rPr>
-              <a:t>THE LIVE PROJECT · GITHUB.COM/TEJASGJADHAV/INSTITUTIONAL-TRADER</a:t>
+              <a:t>HOUR 3 · LIVE LAB IN CODEX</a:t>
             </a:r>
           </a:p>
         </p:txBody>
@@ -12347,7 +10928,7 @@
                 </a:solidFill>
                 <a:latin typeface="Georgia"/>
               </a:rPr>
-              <a:t>The live project: Saavi, a paper-trading bot that runs daily</a:t>
+              <a:t>The lab: one sentence in, a momentum backtest out</a:t>
             </a:r>
           </a:p>
         </p:txBody>
@@ -12381,7 +10962,7 @@
                   <a:srgbClr val="1B2A41"/>
                 </a:solidFill>
               </a:rPr>
-              <a:t>Saavi is slide 4 running for real on NSE options since June 2026. Paper trades only. No order ever goes to the broker.</a:t>
+              <a:t>We type one English sentence into Codex. Codex writes a plan, asks for approval, then builds and runs the backtest in front of the class.</a:t>
             </a:r>
           </a:p>
         </p:txBody>
@@ -12395,7 +10976,7 @@
         <p:spPr>
           <a:xfrm>
             <a:off x="548640" y="1773936"/>
-            <a:ext cx="5760720" cy="2514600"/>
+            <a:ext cx="5120640" cy="2651760"/>
           </a:xfrm>
           <a:prstGeom prst="rect">
             <a:avLst/>
@@ -12439,7 +11020,7 @@
         <p:spPr>
           <a:xfrm>
             <a:off x="804672" y="1938528"/>
-            <a:ext cx="5303520" cy="274320"/>
+            <a:ext cx="4663440" cy="274320"/>
           </a:xfrm>
           <a:prstGeom prst="rect">
             <a:avLst/>
@@ -12459,297 +11040,260 @@
                   <a:srgbClr val="3A5C9E"/>
                 </a:solidFill>
               </a:rPr>
-              <a:t>WHAT IT IS</a:t>
-            </a:r>
-          </a:p>
-        </p:txBody>
-      </p:sp>
-      <p:sp>
-        <p:nvSpPr>
-          <p:cNvPr id="8" name="TextBox 7"/>
-          <p:cNvSpPr txBox="1"/>
-          <p:nvPr/>
-        </p:nvSpPr>
-        <p:spPr>
-          <a:xfrm>
-            <a:off x="804672" y="2267712"/>
-            <a:ext cx="320040" cy="365760"/>
-          </a:xfrm>
-          <a:prstGeom prst="rect">
-            <a:avLst/>
-          </a:prstGeom>
-          <a:noFill/>
-        </p:spPr>
-        <p:txBody>
-          <a:bodyPr wrap="square" anchor="t" lIns="0" rIns="0" tIns="0" bIns="0">
-            <a:spAutoFit/>
-          </a:bodyPr>
-          <a:lstStyle/>
-          <a:p>
-            <a:pPr algn="l"/>
-            <a:r>
-              <a:rPr sz="1400" b="1">
+              <a:t>THE BRIEF WE TYPED</a:t>
+            </a:r>
+          </a:p>
+        </p:txBody>
+      </p:sp>
+      <p:sp>
+        <p:nvSpPr>
+          <p:cNvPr id="8" name="Rectangle 7"/>
+          <p:cNvSpPr/>
+          <p:nvPr/>
+        </p:nvSpPr>
+        <p:spPr>
+          <a:xfrm>
+            <a:off x="804672" y="2249424"/>
+            <a:ext cx="4617720" cy="713232"/>
+          </a:xfrm>
+          <a:prstGeom prst="rect">
+            <a:avLst/>
+          </a:prstGeom>
+          <a:solidFill>
+            <a:srgbClr val="E9EFF8"/>
+          </a:solidFill>
+          <a:ln>
+            <a:noFill/>
+          </a:ln>
+          <a:effectLst/>
+        </p:spPr>
+        <p:style>
+          <a:lnRef idx="1">
+            <a:schemeClr val="accent1"/>
+          </a:lnRef>
+          <a:fillRef idx="3">
+            <a:schemeClr val="accent1"/>
+          </a:fillRef>
+          <a:effectRef idx="2">
+            <a:schemeClr val="accent1"/>
+          </a:effectRef>
+          <a:fontRef idx="minor">
+            <a:schemeClr val="lt1"/>
+          </a:fontRef>
+        </p:style>
+        <p:txBody>
+          <a:bodyPr rtlCol="0" anchor="ctr"/>
+          <a:lstStyle/>
+          <a:p>
+            <a:pPr algn="ctr"/>
+          </a:p>
+        </p:txBody>
+      </p:sp>
+      <p:sp>
+        <p:nvSpPr>
+          <p:cNvPr id="9" name="TextBox 8"/>
+          <p:cNvSpPr txBox="1"/>
+          <p:nvPr/>
+        </p:nvSpPr>
+        <p:spPr>
+          <a:xfrm>
+            <a:off x="950976" y="2322576"/>
+            <a:ext cx="4343400" cy="603504"/>
+          </a:xfrm>
+          <a:prstGeom prst="rect">
+            <a:avLst/>
+          </a:prstGeom>
+          <a:noFill/>
+        </p:spPr>
+        <p:txBody>
+          <a:bodyPr wrap="square" anchor="t" lIns="0" rIns="0" tIns="0" bIns="0">
+            <a:spAutoFit/>
+          </a:bodyPr>
+          <a:lstStyle/>
+          <a:p>
+            <a:pPr algn="l"/>
+            <a:r>
+              <a:rPr sz="1050" b="0">
+                <a:solidFill>
+                  <a:srgbClr val="0F2145"/>
+                </a:solidFill>
+                <a:latin typeface="Georgia"/>
+              </a:rPr>
+              <a:t>“We want to run a Momentum strategy on last two year NSE data with a goal that we get monthly returns above 5%.”</a:t>
+            </a:r>
+          </a:p>
+        </p:txBody>
+      </p:sp>
+      <p:sp>
+        <p:nvSpPr>
+          <p:cNvPr id="10" name="TextBox 9"/>
+          <p:cNvSpPr txBox="1"/>
+          <p:nvPr/>
+        </p:nvSpPr>
+        <p:spPr>
+          <a:xfrm>
+            <a:off x="804672" y="3072384"/>
+            <a:ext cx="4663440" cy="274320"/>
+          </a:xfrm>
+          <a:prstGeom prst="rect">
+            <a:avLst/>
+          </a:prstGeom>
+          <a:noFill/>
+        </p:spPr>
+        <p:txBody>
+          <a:bodyPr wrap="square" anchor="t" lIns="0" rIns="0" tIns="0" bIns="0">
+            <a:spAutoFit/>
+          </a:bodyPr>
+          <a:lstStyle/>
+          <a:p>
+            <a:pPr algn="l"/>
+            <a:r>
+              <a:rPr sz="1000" b="1">
+                <a:solidFill>
+                  <a:srgbClr val="3A5C9E"/>
+                </a:solidFill>
+              </a:rPr>
+              <a:t>WHAT CODEX DID BEFORE WRITING CODE</a:t>
+            </a:r>
+          </a:p>
+        </p:txBody>
+      </p:sp>
+      <p:sp>
+        <p:nvSpPr>
+          <p:cNvPr id="11" name="TextBox 10"/>
+          <p:cNvSpPr txBox="1"/>
+          <p:nvPr/>
+        </p:nvSpPr>
+        <p:spPr>
+          <a:xfrm>
+            <a:off x="804672" y="3364992"/>
+            <a:ext cx="4663440" cy="502920"/>
+          </a:xfrm>
+          <a:prstGeom prst="rect">
+            <a:avLst/>
+          </a:prstGeom>
+          <a:noFill/>
+        </p:spPr>
+        <p:txBody>
+          <a:bodyPr wrap="square" anchor="t" lIns="0" rIns="0" tIns="0" bIns="0">
+            <a:spAutoFit/>
+          </a:bodyPr>
+          <a:lstStyle/>
+          <a:p>
+            <a:pPr algn="l"/>
+            <a:r>
+              <a:rPr sz="950" b="1">
                 <a:solidFill>
                   <a:srgbClr val="C9A227"/>
                 </a:solidFill>
-                <a:latin typeface="Georgia"/>
-              </a:rPr>
-              <a:t>1</a:t>
-            </a:r>
-          </a:p>
-        </p:txBody>
-      </p:sp>
-      <p:sp>
-        <p:nvSpPr>
-          <p:cNvPr id="9" name="TextBox 8"/>
-          <p:cNvSpPr txBox="1"/>
-          <p:nvPr/>
-        </p:nvSpPr>
-        <p:spPr>
-          <a:xfrm>
-            <a:off x="1207008" y="2286000"/>
-            <a:ext cx="4892040" cy="502920"/>
-          </a:xfrm>
-          <a:prstGeom prst="rect">
-            <a:avLst/>
-          </a:prstGeom>
-          <a:noFill/>
-        </p:spPr>
-        <p:txBody>
-          <a:bodyPr wrap="square" anchor="t" lIns="0" rIns="0" tIns="0" bIns="0">
-            <a:spAutoFit/>
-          </a:bodyPr>
-          <a:lstStyle/>
-          <a:p>
-            <a:pPr algn="l"/>
+              </a:rPr>
+              <a:t>▪  </a:t>
+            </a:r>
             <a:r>
               <a:rPr sz="950" b="0">
                 <a:solidFill>
                   <a:srgbClr val="1B2A41"/>
                 </a:solidFill>
               </a:rPr>
-              <a:t>The goal: after a stock breaks out, sell an options credit spread, but only when the credit is at least 40% of the spread width.</a:t>
-            </a:r>
-          </a:p>
-        </p:txBody>
-      </p:sp>
-      <p:sp>
-        <p:nvSpPr>
-          <p:cNvPr id="10" name="TextBox 9"/>
-          <p:cNvSpPr txBox="1"/>
-          <p:nvPr/>
-        </p:nvSpPr>
-        <p:spPr>
-          <a:xfrm>
-            <a:off x="804672" y="2761488"/>
-            <a:ext cx="320040" cy="365760"/>
-          </a:xfrm>
-          <a:prstGeom prst="rect">
-            <a:avLst/>
-          </a:prstGeom>
-          <a:noFill/>
-        </p:spPr>
-        <p:txBody>
-          <a:bodyPr wrap="square" anchor="t" lIns="0" rIns="0" tIns="0" bIns="0">
-            <a:spAutoFit/>
-          </a:bodyPr>
-          <a:lstStyle/>
-          <a:p>
-            <a:pPr algn="l"/>
-            <a:r>
-              <a:rPr sz="1400" b="1">
+              <a:t>Checked the workspace and found no data or code</a:t>
+            </a:r>
+          </a:p>
+        </p:txBody>
+      </p:sp>
+      <p:sp>
+        <p:nvSpPr>
+          <p:cNvPr id="12" name="TextBox 11"/>
+          <p:cNvSpPr txBox="1"/>
+          <p:nvPr/>
+        </p:nvSpPr>
+        <p:spPr>
+          <a:xfrm>
+            <a:off x="804672" y="3694176"/>
+            <a:ext cx="4663440" cy="502920"/>
+          </a:xfrm>
+          <a:prstGeom prst="rect">
+            <a:avLst/>
+          </a:prstGeom>
+          <a:noFill/>
+        </p:spPr>
+        <p:txBody>
+          <a:bodyPr wrap="square" anchor="t" lIns="0" rIns="0" tIns="0" bIns="0">
+            <a:spAutoFit/>
+          </a:bodyPr>
+          <a:lstStyle/>
+          <a:p>
+            <a:pPr algn="l"/>
+            <a:r>
+              <a:rPr sz="950" b="1">
                 <a:solidFill>
                   <a:srgbClr val="C9A227"/>
                 </a:solidFill>
-                <a:latin typeface="Georgia"/>
-              </a:rPr>
-              <a:t>2</a:t>
-            </a:r>
-          </a:p>
-        </p:txBody>
-      </p:sp>
-      <p:sp>
-        <p:nvSpPr>
-          <p:cNvPr id="11" name="TextBox 10"/>
-          <p:cNvSpPr txBox="1"/>
-          <p:nvPr/>
-        </p:nvSpPr>
-        <p:spPr>
-          <a:xfrm>
-            <a:off x="1207008" y="2779776"/>
-            <a:ext cx="4892040" cy="502920"/>
-          </a:xfrm>
-          <a:prstGeom prst="rect">
-            <a:avLst/>
-          </a:prstGeom>
-          <a:noFill/>
-        </p:spPr>
-        <p:txBody>
-          <a:bodyPr wrap="square" anchor="t" lIns="0" rIns="0" tIns="0" bIns="0">
-            <a:spAutoFit/>
-          </a:bodyPr>
-          <a:lstStyle/>
-          <a:p>
-            <a:pPr algn="l"/>
+              </a:rPr>
+              <a:t>▪  </a:t>
+            </a:r>
             <a:r>
               <a:rPr sz="950" b="0">
                 <a:solidFill>
                   <a:srgbClr val="1B2A41"/>
                 </a:solidFill>
               </a:rPr>
-              <a:t>The loop: scan at 15:36 every trading day, send each signal to a Telegram channel, record the result at expiry.</a:t>
-            </a:r>
-          </a:p>
-        </p:txBody>
-      </p:sp>
-      <p:sp>
-        <p:nvSpPr>
-          <p:cNvPr id="12" name="TextBox 11"/>
-          <p:cNvSpPr txBox="1"/>
-          <p:nvPr/>
-        </p:nvSpPr>
-        <p:spPr>
-          <a:xfrm>
-            <a:off x="804672" y="3255264"/>
-            <a:ext cx="320040" cy="365760"/>
-          </a:xfrm>
-          <a:prstGeom prst="rect">
-            <a:avLst/>
-          </a:prstGeom>
-          <a:noFill/>
-        </p:spPr>
-        <p:txBody>
-          <a:bodyPr wrap="square" anchor="t" lIns="0" rIns="0" tIns="0" bIns="0">
-            <a:spAutoFit/>
-          </a:bodyPr>
-          <a:lstStyle/>
-          <a:p>
-            <a:pPr algn="l"/>
-            <a:r>
-              <a:rPr sz="1400" b="1">
+              <a:t>Asked us three questions, then searched for NSE data sources</a:t>
+            </a:r>
+          </a:p>
+        </p:txBody>
+      </p:sp>
+      <p:sp>
+        <p:nvSpPr>
+          <p:cNvPr id="13" name="TextBox 12"/>
+          <p:cNvSpPr txBox="1"/>
+          <p:nvPr/>
+        </p:nvSpPr>
+        <p:spPr>
+          <a:xfrm>
+            <a:off x="804672" y="4023360"/>
+            <a:ext cx="4663440" cy="502920"/>
+          </a:xfrm>
+          <a:prstGeom prst="rect">
+            <a:avLst/>
+          </a:prstGeom>
+          <a:noFill/>
+        </p:spPr>
+        <p:txBody>
+          <a:bodyPr wrap="square" anchor="t" lIns="0" rIns="0" tIns="0" bIns="0">
+            <a:spAutoFit/>
+          </a:bodyPr>
+          <a:lstStyle/>
+          <a:p>
+            <a:pPr algn="l"/>
+            <a:r>
+              <a:rPr sz="950" b="1">
                 <a:solidFill>
                   <a:srgbClr val="C9A227"/>
                 </a:solidFill>
-                <a:latin typeface="Georgia"/>
-              </a:rPr>
-              <a:t>3</a:t>
-            </a:r>
-          </a:p>
-        </p:txBody>
-      </p:sp>
-      <p:sp>
-        <p:nvSpPr>
-          <p:cNvPr id="13" name="TextBox 12"/>
-          <p:cNvSpPr txBox="1"/>
-          <p:nvPr/>
-        </p:nvSpPr>
-        <p:spPr>
-          <a:xfrm>
-            <a:off x="1207008" y="3273552"/>
-            <a:ext cx="4892040" cy="502920"/>
-          </a:xfrm>
-          <a:prstGeom prst="rect">
-            <a:avLst/>
-          </a:prstGeom>
-          <a:noFill/>
-        </p:spPr>
-        <p:txBody>
-          <a:bodyPr wrap="square" anchor="t" lIns="0" rIns="0" tIns="0" bIns="0">
-            <a:spAutoFit/>
-          </a:bodyPr>
-          <a:lstStyle/>
-          <a:p>
-            <a:pPr algn="l"/>
+              </a:rPr>
+              <a:t>▪  </a:t>
+            </a:r>
             <a:r>
               <a:rPr sz="950" b="0">
                 <a:solidFill>
                   <a:srgbClr val="1B2A41"/>
                 </a:solidFill>
               </a:rPr>
-              <a:t>The test: 2019 to Sep 2024 in-sample, Oct 2024 onward out-of-sample. The leading book won 83.6% of its out-of-sample trades.</a:t>
-            </a:r>
-          </a:p>
-        </p:txBody>
-      </p:sp>
-      <p:sp>
-        <p:nvSpPr>
-          <p:cNvPr id="14" name="TextBox 13"/>
-          <p:cNvSpPr txBox="1"/>
-          <p:nvPr/>
-        </p:nvSpPr>
-        <p:spPr>
-          <a:xfrm>
-            <a:off x="804672" y="3749039"/>
-            <a:ext cx="320040" cy="365760"/>
-          </a:xfrm>
-          <a:prstGeom prst="rect">
-            <a:avLst/>
-          </a:prstGeom>
-          <a:noFill/>
-        </p:spPr>
-        <p:txBody>
-          <a:bodyPr wrap="square" anchor="t" lIns="0" rIns="0" tIns="0" bIns="0">
-            <a:spAutoFit/>
-          </a:bodyPr>
-          <a:lstStyle/>
-          <a:p>
-            <a:pPr algn="l"/>
-            <a:r>
-              <a:rPr sz="1400" b="1">
-                <a:solidFill>
-                  <a:srgbClr val="C9A227"/>
-                </a:solidFill>
-                <a:latin typeface="Georgia"/>
-              </a:rPr>
-              <a:t>4</a:t>
-            </a:r>
-          </a:p>
-        </p:txBody>
-      </p:sp>
-      <p:sp>
-        <p:nvSpPr>
-          <p:cNvPr id="15" name="TextBox 14"/>
-          <p:cNvSpPr txBox="1"/>
-          <p:nvPr/>
-        </p:nvSpPr>
-        <p:spPr>
-          <a:xfrm>
-            <a:off x="1207008" y="3767327"/>
-            <a:ext cx="4892040" cy="502920"/>
-          </a:xfrm>
-          <a:prstGeom prst="rect">
-            <a:avLst/>
-          </a:prstGeom>
-          <a:noFill/>
-        </p:spPr>
-        <p:txBody>
-          <a:bodyPr wrap="square" anchor="t" lIns="0" rIns="0" tIns="0" bIns="0">
-            <a:spAutoFit/>
-          </a:bodyPr>
-          <a:lstStyle/>
-          <a:p>
-            <a:pPr algn="l"/>
-            <a:r>
-              <a:rPr sz="950" b="0">
-                <a:solidFill>
-                  <a:srgbClr val="1B2A41"/>
-                </a:solidFill>
-              </a:rPr>
-              <a:t>The rule for shutting it down was written before the first trade: 30 closed trades and a 70% win rate, or the book closes.</a:t>
-            </a:r>
-          </a:p>
-        </p:txBody>
-      </p:sp>
-      <p:sp>
-        <p:nvSpPr>
-          <p:cNvPr id="16" name="Rectangle 15"/>
+              <a:t>Wrote a plan and asked “Implement this plan?” before touching a file</a:t>
+            </a:r>
+          </a:p>
+        </p:txBody>
+      </p:sp>
+      <p:sp>
+        <p:nvSpPr>
+          <p:cNvPr id="14" name="Rectangle 13"/>
           <p:cNvSpPr/>
           <p:nvPr/>
         </p:nvSpPr>
         <p:spPr>
           <a:xfrm>
-            <a:off x="6492240" y="1773936"/>
-            <a:ext cx="5148072" cy="2514600"/>
+            <a:off x="5852160" y="1773936"/>
+            <a:ext cx="5788152" cy="2651760"/>
           </a:xfrm>
           <a:prstGeom prst="rect">
             <a:avLst/>
@@ -12786,34 +11330,103 @@
       </p:sp>
       <p:sp>
         <p:nvSpPr>
+          <p:cNvPr id="15" name="TextBox 14"/>
+          <p:cNvSpPr txBox="1"/>
+          <p:nvPr/>
+        </p:nvSpPr>
+        <p:spPr>
+          <a:xfrm>
+            <a:off x="6108192" y="1938528"/>
+            <a:ext cx="5303520" cy="274320"/>
+          </a:xfrm>
+          <a:prstGeom prst="rect">
+            <a:avLst/>
+          </a:prstGeom>
+          <a:noFill/>
+        </p:spPr>
+        <p:txBody>
+          <a:bodyPr wrap="square" anchor="t" lIns="0" rIns="0" tIns="0" bIns="0">
+            <a:spAutoFit/>
+          </a:bodyPr>
+          <a:lstStyle/>
+          <a:p>
+            <a:pPr algn="l"/>
+            <a:r>
+              <a:rPr sz="1000" b="1">
+                <a:solidFill>
+                  <a:srgbClr val="3A5C9E"/>
+                </a:solidFill>
+              </a:rPr>
+              <a:t>THE PLAN CODEX WROTE</a:t>
+            </a:r>
+          </a:p>
+        </p:txBody>
+      </p:sp>
+      <p:sp>
+        <p:nvSpPr>
+          <p:cNvPr id="16" name="TextBox 15"/>
+          <p:cNvSpPr txBox="1"/>
+          <p:nvPr/>
+        </p:nvSpPr>
+        <p:spPr>
+          <a:xfrm>
+            <a:off x="6108192" y="2249424"/>
+            <a:ext cx="320040" cy="365760"/>
+          </a:xfrm>
+          <a:prstGeom prst="rect">
+            <a:avLst/>
+          </a:prstGeom>
+          <a:noFill/>
+        </p:spPr>
+        <p:txBody>
+          <a:bodyPr wrap="square" anchor="t" lIns="0" rIns="0" tIns="0" bIns="0">
+            <a:spAutoFit/>
+          </a:bodyPr>
+          <a:lstStyle/>
+          <a:p>
+            <a:pPr algn="l"/>
+            <a:r>
+              <a:rPr sz="1300" b="1">
+                <a:solidFill>
+                  <a:srgbClr val="C9A227"/>
+                </a:solidFill>
+                <a:latin typeface="Georgia"/>
+              </a:rPr>
+              <a:t>1</a:t>
+            </a:r>
+          </a:p>
+        </p:txBody>
+      </p:sp>
+      <p:sp>
+        <p:nvSpPr>
           <p:cNvPr id="17" name="TextBox 16"/>
           <p:cNvSpPr txBox="1"/>
           <p:nvPr/>
         </p:nvSpPr>
         <p:spPr>
           <a:xfrm>
-            <a:off x="6748272" y="1938528"/>
-            <a:ext cx="4663440" cy="274320"/>
-          </a:xfrm>
-          <a:prstGeom prst="rect">
-            <a:avLst/>
-          </a:prstGeom>
-          <a:noFill/>
-        </p:spPr>
-        <p:txBody>
-          <a:bodyPr wrap="square" anchor="t" lIns="0" rIns="0" tIns="0" bIns="0">
-            <a:spAutoFit/>
-          </a:bodyPr>
-          <a:lstStyle/>
-          <a:p>
-            <a:pPr algn="l"/>
-            <a:r>
-              <a:rPr sz="1000" b="1">
-                <a:solidFill>
-                  <a:srgbClr val="3A5C9E"/>
-                </a:solidFill>
-              </a:rPr>
-              <a:t>WHAT IT TAUGHT US</a:t>
+            <a:off x="6473952" y="2267712"/>
+            <a:ext cx="4983480" cy="457200"/>
+          </a:xfrm>
+          <a:prstGeom prst="rect">
+            <a:avLst/>
+          </a:prstGeom>
+          <a:noFill/>
+        </p:spPr>
+        <p:txBody>
+          <a:bodyPr wrap="square" anchor="t" lIns="0" rIns="0" tIns="0" bIns="0">
+            <a:spAutoFit/>
+          </a:bodyPr>
+          <a:lstStyle/>
+          <a:p>
+            <a:pPr algn="l"/>
+            <a:r>
+              <a:rPr sz="950" b="0">
+                <a:solidFill>
+                  <a:srgbClr val="1B2A41"/>
+                </a:solidFill>
+              </a:rPr>
+              <a:t>Download 36 months of NSE data: 12 to form the signal, 24 to test on.</a:t>
             </a:r>
           </a:p>
         </p:txBody>
@@ -12826,176 +11439,284 @@
         </p:nvSpPr>
         <p:spPr>
           <a:xfrm>
-            <a:off x="6748272" y="2267712"/>
-            <a:ext cx="4663440" cy="502920"/>
-          </a:xfrm>
-          <a:prstGeom prst="rect">
-            <a:avLst/>
-          </a:prstGeom>
-          <a:noFill/>
-        </p:spPr>
-        <p:txBody>
-          <a:bodyPr wrap="square" anchor="t" lIns="0" rIns="0" tIns="0" bIns="0">
-            <a:spAutoFit/>
-          </a:bodyPr>
-          <a:lstStyle/>
-          <a:p>
-            <a:pPr algn="l"/>
-            <a:r>
-              <a:rPr sz="950" b="1">
+            <a:off x="6108192" y="2670048"/>
+            <a:ext cx="320040" cy="365760"/>
+          </a:xfrm>
+          <a:prstGeom prst="rect">
+            <a:avLst/>
+          </a:prstGeom>
+          <a:noFill/>
+        </p:spPr>
+        <p:txBody>
+          <a:bodyPr wrap="square" anchor="t" lIns="0" rIns="0" tIns="0" bIns="0">
+            <a:spAutoFit/>
+          </a:bodyPr>
+          <a:lstStyle/>
+          <a:p>
+            <a:pPr algn="l"/>
+            <a:r>
+              <a:rPr sz="1300" b="1">
                 <a:solidFill>
                   <a:srgbClr val="C9A227"/>
                 </a:solidFill>
-              </a:rPr>
-              <a:t>▪  </a:t>
-            </a:r>
+                <a:latin typeface="Georgia"/>
+              </a:rPr>
+              <a:t>2</a:t>
+            </a:r>
+          </a:p>
+        </p:txBody>
+      </p:sp>
+      <p:sp>
+        <p:nvSpPr>
+          <p:cNvPr id="19" name="TextBox 18"/>
+          <p:cNvSpPr txBox="1"/>
+          <p:nvPr/>
+        </p:nvSpPr>
+        <p:spPr>
+          <a:xfrm>
+            <a:off x="6473952" y="2688336"/>
+            <a:ext cx="4983480" cy="457200"/>
+          </a:xfrm>
+          <a:prstGeom prst="rect">
+            <a:avLst/>
+          </a:prstGeom>
+          <a:noFill/>
+        </p:spPr>
+        <p:txBody>
+          <a:bodyPr wrap="square" anchor="t" lIns="0" rIns="0" tIns="0" bIns="0">
+            <a:spAutoFit/>
+          </a:bodyPr>
+          <a:lstStyle/>
+          <a:p>
+            <a:pPr algn="l"/>
             <a:r>
               <a:rPr sz="950" b="0">
                 <a:solidFill>
                   <a:srgbClr val="1B2A41"/>
                 </a:solidFill>
               </a:rPr>
-              <a:t>A 70% win rate with 3% a month was hunted across 3,550 rule variations. None passed.</a:t>
-            </a:r>
-          </a:p>
-        </p:txBody>
-      </p:sp>
-      <p:sp>
-        <p:nvSpPr>
-          <p:cNvPr id="19" name="TextBox 18"/>
-          <p:cNvSpPr txBox="1"/>
-          <p:nvPr/>
-        </p:nvSpPr>
-        <p:spPr>
-          <a:xfrm>
-            <a:off x="6748272" y="2743200"/>
-            <a:ext cx="4663440" cy="502920"/>
-          </a:xfrm>
-          <a:prstGeom prst="rect">
-            <a:avLst/>
-          </a:prstGeom>
-          <a:noFill/>
-        </p:spPr>
-        <p:txBody>
-          <a:bodyPr wrap="square" anchor="t" lIns="0" rIns="0" tIns="0" bIns="0">
-            <a:spAutoFit/>
-          </a:bodyPr>
-          <a:lstStyle/>
-          <a:p>
-            <a:pPr algn="l"/>
-            <a:r>
-              <a:rPr sz="950" b="1">
+              <a:t>At each month-end, rank the NIFTY 50 stocks by 12-1 momentum: the return from 12 months ago to one month ago.</a:t>
+            </a:r>
+          </a:p>
+        </p:txBody>
+      </p:sp>
+      <p:sp>
+        <p:nvSpPr>
+          <p:cNvPr id="20" name="TextBox 19"/>
+          <p:cNvSpPr txBox="1"/>
+          <p:nvPr/>
+        </p:nvSpPr>
+        <p:spPr>
+          <a:xfrm>
+            <a:off x="6108192" y="3090672"/>
+            <a:ext cx="320040" cy="365760"/>
+          </a:xfrm>
+          <a:prstGeom prst="rect">
+            <a:avLst/>
+          </a:prstGeom>
+          <a:noFill/>
+        </p:spPr>
+        <p:txBody>
+          <a:bodyPr wrap="square" anchor="t" lIns="0" rIns="0" tIns="0" bIns="0">
+            <a:spAutoFit/>
+          </a:bodyPr>
+          <a:lstStyle/>
+          <a:p>
+            <a:pPr algn="l"/>
+            <a:r>
+              <a:rPr sz="1300" b="1">
                 <a:solidFill>
                   <a:srgbClr val="C9A227"/>
                 </a:solidFill>
-              </a:rPr>
-              <a:t>▪  </a:t>
-            </a:r>
+                <a:latin typeface="Georgia"/>
+              </a:rPr>
+              <a:t>3</a:t>
+            </a:r>
+          </a:p>
+        </p:txBody>
+      </p:sp>
+      <p:sp>
+        <p:nvSpPr>
+          <p:cNvPr id="21" name="TextBox 20"/>
+          <p:cNvSpPr txBox="1"/>
+          <p:nvPr/>
+        </p:nvSpPr>
+        <p:spPr>
+          <a:xfrm>
+            <a:off x="6473952" y="3108960"/>
+            <a:ext cx="4983480" cy="457200"/>
+          </a:xfrm>
+          <a:prstGeom prst="rect">
+            <a:avLst/>
+          </a:prstGeom>
+          <a:noFill/>
+        </p:spPr>
+        <p:txBody>
+          <a:bodyPr wrap="square" anchor="t" lIns="0" rIns="0" tIns="0" bIns="0">
+            <a:spAutoFit/>
+          </a:bodyPr>
+          <a:lstStyle/>
+          <a:p>
+            <a:pPr algn="l"/>
             <a:r>
               <a:rPr sz="950" b="0">
                 <a:solidFill>
                   <a:srgbClr val="1B2A41"/>
                 </a:solidFill>
               </a:rPr>
-              <a:t>A stale price bar made 19 trades fire a day late. Code review missed it. Checking the data at trade time caught it.</a:t>
-            </a:r>
-          </a:p>
-        </p:txBody>
-      </p:sp>
-      <p:sp>
-        <p:nvSpPr>
-          <p:cNvPr id="20" name="TextBox 19"/>
-          <p:cNvSpPr txBox="1"/>
-          <p:nvPr/>
-        </p:nvSpPr>
-        <p:spPr>
-          <a:xfrm>
-            <a:off x="6748272" y="3218688"/>
-            <a:ext cx="4663440" cy="502920"/>
-          </a:xfrm>
-          <a:prstGeom prst="rect">
-            <a:avLst/>
-          </a:prstGeom>
-          <a:noFill/>
-        </p:spPr>
-        <p:txBody>
-          <a:bodyPr wrap="square" anchor="t" lIns="0" rIns="0" tIns="0" bIns="0">
-            <a:spAutoFit/>
-          </a:bodyPr>
-          <a:lstStyle/>
-          <a:p>
-            <a:pPr algn="l"/>
-            <a:r>
-              <a:rPr sz="950" b="1">
+              <a:t>Hold the top five at 20% each, long only, and trade at the next session's open.</a:t>
+            </a:r>
+          </a:p>
+        </p:txBody>
+      </p:sp>
+      <p:sp>
+        <p:nvSpPr>
+          <p:cNvPr id="22" name="TextBox 21"/>
+          <p:cNvSpPr txBox="1"/>
+          <p:nvPr/>
+        </p:nvSpPr>
+        <p:spPr>
+          <a:xfrm>
+            <a:off x="6108192" y="3511296"/>
+            <a:ext cx="320040" cy="365760"/>
+          </a:xfrm>
+          <a:prstGeom prst="rect">
+            <a:avLst/>
+          </a:prstGeom>
+          <a:noFill/>
+        </p:spPr>
+        <p:txBody>
+          <a:bodyPr wrap="square" anchor="t" lIns="0" rIns="0" tIns="0" bIns="0">
+            <a:spAutoFit/>
+          </a:bodyPr>
+          <a:lstStyle/>
+          <a:p>
+            <a:pPr algn="l"/>
+            <a:r>
+              <a:rPr sz="1300" b="1">
                 <a:solidFill>
                   <a:srgbClr val="C9A227"/>
                 </a:solidFill>
-              </a:rPr>
-              <a:t>▪  </a:t>
-            </a:r>
+                <a:latin typeface="Georgia"/>
+              </a:rPr>
+              <a:t>4</a:t>
+            </a:r>
+          </a:p>
+        </p:txBody>
+      </p:sp>
+      <p:sp>
+        <p:nvSpPr>
+          <p:cNvPr id="23" name="TextBox 22"/>
+          <p:cNvSpPr txBox="1"/>
+          <p:nvPr/>
+        </p:nvSpPr>
+        <p:spPr>
+          <a:xfrm>
+            <a:off x="6473952" y="3529584"/>
+            <a:ext cx="4983480" cy="457200"/>
+          </a:xfrm>
+          <a:prstGeom prst="rect">
+            <a:avLst/>
+          </a:prstGeom>
+          <a:noFill/>
+        </p:spPr>
+        <p:txBody>
+          <a:bodyPr wrap="square" anchor="t" lIns="0" rIns="0" tIns="0" bIns="0">
+            <a:spAutoFit/>
+          </a:bodyPr>
+          <a:lstStyle/>
+          <a:p>
+            <a:pPr algn="l"/>
             <a:r>
               <a:rPr sz="950" b="0">
                 <a:solidFill>
                   <a:srgbClr val="1B2A41"/>
                 </a:solidFill>
               </a:rPr>
-              <a:t>The backtest cannot see the bid-ask spread. Live, that one gate rejected more than half the candidates.</a:t>
-            </a:r>
-          </a:p>
-        </p:txBody>
-      </p:sp>
-      <p:sp>
-        <p:nvSpPr>
-          <p:cNvPr id="21" name="TextBox 20"/>
-          <p:cNvSpPr txBox="1"/>
-          <p:nvPr/>
-        </p:nvSpPr>
-        <p:spPr>
-          <a:xfrm>
-            <a:off x="6748272" y="3694176"/>
-            <a:ext cx="4663440" cy="502920"/>
-          </a:xfrm>
-          <a:prstGeom prst="rect">
-            <a:avLst/>
-          </a:prstGeom>
-          <a:noFill/>
-        </p:spPr>
-        <p:txBody>
-          <a:bodyPr wrap="square" anchor="t" lIns="0" rIns="0" tIns="0" bIns="0">
-            <a:spAutoFit/>
-          </a:bodyPr>
-          <a:lstStyle/>
-          <a:p>
-            <a:pPr algn="l"/>
-            <a:r>
-              <a:rPr sz="950" b="1">
+              <a:t>Charge 25, 50 and 100 bps round trip, and compare each run to the NIFTY 50 total return.</a:t>
+            </a:r>
+          </a:p>
+        </p:txBody>
+      </p:sp>
+      <p:sp>
+        <p:nvSpPr>
+          <p:cNvPr id="24" name="TextBox 23"/>
+          <p:cNvSpPr txBox="1"/>
+          <p:nvPr/>
+        </p:nvSpPr>
+        <p:spPr>
+          <a:xfrm>
+            <a:off x="6108192" y="3931920"/>
+            <a:ext cx="320040" cy="365760"/>
+          </a:xfrm>
+          <a:prstGeom prst="rect">
+            <a:avLst/>
+          </a:prstGeom>
+          <a:noFill/>
+        </p:spPr>
+        <p:txBody>
+          <a:bodyPr wrap="square" anchor="t" lIns="0" rIns="0" tIns="0" bIns="0">
+            <a:spAutoFit/>
+          </a:bodyPr>
+          <a:lstStyle/>
+          <a:p>
+            <a:pPr algn="l"/>
+            <a:r>
+              <a:rPr sz="1300" b="1">
                 <a:solidFill>
                   <a:srgbClr val="C9A227"/>
                 </a:solidFill>
-              </a:rPr>
-              <a:t>▪  </a:t>
-            </a:r>
+                <a:latin typeface="Georgia"/>
+              </a:rPr>
+              <a:t>5</a:t>
+            </a:r>
+          </a:p>
+        </p:txBody>
+      </p:sp>
+      <p:sp>
+        <p:nvSpPr>
+          <p:cNvPr id="25" name="TextBox 24"/>
+          <p:cNvSpPr txBox="1"/>
+          <p:nvPr/>
+        </p:nvSpPr>
+        <p:spPr>
+          <a:xfrm>
+            <a:off x="6473952" y="3950207"/>
+            <a:ext cx="4983480" cy="457200"/>
+          </a:xfrm>
+          <a:prstGeom prst="rect">
+            <a:avLst/>
+          </a:prstGeom>
+          <a:noFill/>
+        </p:spPr>
+        <p:txBody>
+          <a:bodyPr wrap="square" anchor="t" lIns="0" rIns="0" tIns="0" bIns="0">
+            <a:spAutoFit/>
+          </a:bodyPr>
+          <a:lstStyle/>
+          <a:p>
+            <a:pPr algn="l"/>
             <a:r>
               <a:rPr sz="950" b="0">
                 <a:solidFill>
                   <a:srgbClr val="1B2A41"/>
                 </a:solidFill>
               </a:rPr>
-              <a:t>Two lines a day in a log beat a hundred backtests.</a:t>
-            </a:r>
-          </a:p>
-        </p:txBody>
-      </p:sp>
-      <p:sp>
-        <p:nvSpPr>
-          <p:cNvPr id="22" name="Rectangle 21"/>
+              <a:t>Write out holdings, turnover, trades, NAV and monthly returns. Halt on missing history instead of filling it.</a:t>
+            </a:r>
+          </a:p>
+        </p:txBody>
+      </p:sp>
+      <p:sp>
+        <p:nvSpPr>
+          <p:cNvPr id="26" name="Rectangle 25"/>
           <p:cNvSpPr/>
           <p:nvPr/>
         </p:nvSpPr>
         <p:spPr>
           <a:xfrm>
-            <a:off x="548640" y="4434840"/>
-            <a:ext cx="5760720" cy="1097280"/>
+            <a:off x="548640" y="4572000"/>
+            <a:ext cx="5120640" cy="1005840"/>
           </a:xfrm>
           <a:prstGeom prst="rect">
             <a:avLst/>
@@ -13032,14 +11753,14 @@
       </p:sp>
       <p:sp>
         <p:nvSpPr>
-          <p:cNvPr id="23" name="Rectangle 22"/>
+          <p:cNvPr id="27" name="Rectangle 26"/>
           <p:cNvSpPr/>
           <p:nvPr/>
         </p:nvSpPr>
         <p:spPr>
           <a:xfrm>
-            <a:off x="548640" y="4434840"/>
-            <a:ext cx="64008" cy="1097280"/>
+            <a:off x="548640" y="4572000"/>
+            <a:ext cx="64008" cy="1005840"/>
           </a:xfrm>
           <a:prstGeom prst="rect">
             <a:avLst/>
@@ -13076,14 +11797,14 @@
       </p:sp>
       <p:sp>
         <p:nvSpPr>
-          <p:cNvPr id="24" name="TextBox 23"/>
-          <p:cNvSpPr txBox="1"/>
-          <p:nvPr/>
-        </p:nvSpPr>
-        <p:spPr>
-          <a:xfrm>
-            <a:off x="822960" y="4572000"/>
-            <a:ext cx="5257800" cy="914400"/>
+          <p:cNvPr id="28" name="TextBox 27"/>
+          <p:cNvSpPr txBox="1"/>
+          <p:nvPr/>
+        </p:nvSpPr>
+        <p:spPr>
+          <a:xfrm>
+            <a:off x="822960" y="4681728"/>
+            <a:ext cx="4663440" cy="868680"/>
           </a:xfrm>
           <a:prstGeom prst="rect">
             <a:avLst/>
@@ -13103,7 +11824,7 @@
                   <a:srgbClr val="8F7113"/>
                 </a:solidFill>
               </a:rPr>
-              <a:t>GOAL + LOOP, IN THE WILD</a:t>
+              <a:t>WHAT YOU DO IN CLASS</a:t>
             </a:r>
           </a:p>
           <a:p>
@@ -13118,21 +11839,21 @@
                   <a:srgbClr val="1B2A41"/>
                 </a:solidFill>
               </a:rPr>
-              <a:t>On 26 August 2026 the loop fired at 15:36:09 on ULTRACEMCO. The signal reached Telegram fifteen seconds later. Nobody typed anything.</a:t>
-            </a:r>
-          </a:p>
-        </p:txBody>
-      </p:sp>
-      <p:sp>
-        <p:nvSpPr>
-          <p:cNvPr id="25" name="Rectangle 24"/>
+              <a:t>Approve the plan. Read the monthly return table and count the months above 5%. Then read the same table at 25, 50 and 100 bps and see what costs take away.</a:t>
+            </a:r>
+          </a:p>
+        </p:txBody>
+      </p:sp>
+      <p:sp>
+        <p:nvSpPr>
+          <p:cNvPr id="29" name="Rectangle 28"/>
           <p:cNvSpPr/>
           <p:nvPr/>
         </p:nvSpPr>
         <p:spPr>
           <a:xfrm>
-            <a:off x="6492240" y="4434840"/>
-            <a:ext cx="5148072" cy="1097280"/>
+            <a:off x="5852160" y="4572000"/>
+            <a:ext cx="5788152" cy="1005840"/>
           </a:xfrm>
           <a:prstGeom prst="rect">
             <a:avLst/>
@@ -13169,14 +11890,14 @@
       </p:sp>
       <p:sp>
         <p:nvSpPr>
-          <p:cNvPr id="26" name="Rectangle 25"/>
+          <p:cNvPr id="30" name="Rectangle 29"/>
           <p:cNvSpPr/>
           <p:nvPr/>
         </p:nvSpPr>
         <p:spPr>
           <a:xfrm>
-            <a:off x="6492240" y="4434840"/>
-            <a:ext cx="64008" cy="1097280"/>
+            <a:off x="5852160" y="4572000"/>
+            <a:ext cx="64008" cy="1005840"/>
           </a:xfrm>
           <a:prstGeom prst="rect">
             <a:avLst/>
@@ -13213,14 +11934,14 @@
       </p:sp>
       <p:sp>
         <p:nvSpPr>
-          <p:cNvPr id="27" name="TextBox 26"/>
-          <p:cNvSpPr txBox="1"/>
-          <p:nvPr/>
-        </p:nvSpPr>
-        <p:spPr>
-          <a:xfrm>
-            <a:off x="6766560" y="4572000"/>
-            <a:ext cx="4617720" cy="914400"/>
+          <p:cNvPr id="31" name="TextBox 30"/>
+          <p:cNvSpPr txBox="1"/>
+          <p:nvPr/>
+        </p:nvSpPr>
+        <p:spPr>
+          <a:xfrm>
+            <a:off x="6126480" y="4681728"/>
+            <a:ext cx="5303520" cy="868680"/>
           </a:xfrm>
           <a:prstGeom prst="rect">
             <a:avLst/>
@@ -13240,7 +11961,7 @@
                   <a:srgbClr val="8F7113"/>
                 </a:solidFill>
               </a:rPr>
-              <a:t>READ IT YOURSELF</a:t>
+              <a:t>THE LESSON</a:t>
             </a:r>
           </a:p>
           <a:p>
@@ -13255,14 +11976,14 @@
                   <a:srgbClr val="1B2A41"/>
                 </a:solidFill>
               </a:rPr>
-              <a:t>The repo is public and free to study. Start with README.md, then How_We_Built_The_Strategy.pdf. It is for education only, not advice.</a:t>
-            </a:r>
-          </a:p>
-        </p:txBody>
-      </p:sp>
-      <p:sp>
-        <p:nvSpPr>
-          <p:cNvPr id="28" name="Rectangle 27"/>
+              <a:t>Codex called 5% a month an aggressive target and treated it as a constraint to test, not a return to promise. That is the right habit. The goal was our sentence. Codex turned it into a loop of month-ends.</a:t>
+            </a:r>
+          </a:p>
+        </p:txBody>
+      </p:sp>
+      <p:sp>
+        <p:nvSpPr>
+          <p:cNvPr id="32" name="Rectangle 31"/>
           <p:cNvSpPr/>
           <p:nvPr/>
         </p:nvSpPr>
@@ -13306,7 +12027,7 @@
       </p:sp>
       <p:sp>
         <p:nvSpPr>
-          <p:cNvPr id="29" name="Rectangle 28"/>
+          <p:cNvPr id="33" name="Rectangle 32"/>
           <p:cNvSpPr/>
           <p:nvPr/>
         </p:nvSpPr>
@@ -13350,7 +12071,7 @@
       </p:sp>
       <p:sp>
         <p:nvSpPr>
-          <p:cNvPr id="30" name="TextBox 29"/>
+          <p:cNvPr id="34" name="TextBox 33"/>
           <p:cNvSpPr txBox="1"/>
           <p:nvPr/>
         </p:nvSpPr>
@@ -13377,7 +12098,7 @@
                   <a:srgbClr val="C9A227"/>
                 </a:solidFill>
               </a:rPr>
-              <a:t>Why show you this:  </a:t>
+              <a:t>What you have at the end:  </a:t>
             </a:r>
             <a:r>
               <a:rPr sz="1200" b="0">
@@ -13385,14 +12106,14 @@
                   <a:srgbClr val="FFFFFF"/>
                 </a:solidFill>
               </a:rPr>
-              <a:t>a rule that survives two years of honest testing is still only a candidate. The live record decides.</a:t>
-            </a:r>
-          </a:p>
-        </p:txBody>
-      </p:sp>
-      <p:sp>
-        <p:nvSpPr>
-          <p:cNvPr id="31" name="TextBox 30"/>
+              <a:t>a backtest you wrote as one sentence, and a monthly table that says whether 5% a month was ever real.</a:t>
+            </a:r>
+          </a:p>
+        </p:txBody>
+      </p:sp>
+      <p:sp>
+        <p:nvSpPr>
+          <p:cNvPr id="35" name="TextBox 34"/>
           <p:cNvSpPr txBox="1"/>
           <p:nvPr/>
         </p:nvSpPr>
@@ -13426,7 +12147,7 @@
       </p:sp>
       <p:sp>
         <p:nvSpPr>
-          <p:cNvPr id="32" name="TextBox 31"/>
+          <p:cNvPr id="36" name="TextBox 35"/>
           <p:cNvSpPr txBox="1"/>
           <p:nvPr/>
         </p:nvSpPr>
@@ -13557,7 +12278,7 @@
                   <a:srgbClr val="C9A227"/>
                 </a:solidFill>
               </a:rPr>
-              <a:t>SAAVI IN PRACTICE · ONE TEST, ONE API, ONE CHART</a:t>
+              <a:t>PRACTICE QUESTIONS</a:t>
             </a:r>
           </a:p>
         </p:txBody>
@@ -13592,7 +12313,7 @@
                 </a:solidFill>
                 <a:latin typeface="Georgia"/>
               </a:rPr>
-              <a:t>Saavi: a VWAP test, the Upstox API, and TradingView</a:t>
+              <a:t>Six questions before the exam</a:t>
             </a:r>
           </a:p>
         </p:txBody>
@@ -13605,155 +12326,8 @@
         </p:nvSpPr>
         <p:spPr>
           <a:xfrm>
-            <a:off x="548640" y="1572768"/>
-            <a:ext cx="3611880" cy="3840480"/>
-          </a:xfrm>
-          <a:prstGeom prst="rect">
-            <a:avLst/>
-          </a:prstGeom>
-          <a:solidFill>
-            <a:srgbClr val="E9EFF8"/>
-          </a:solidFill>
-          <a:ln>
-            <a:noFill/>
-          </a:ln>
-          <a:effectLst/>
-        </p:spPr>
-        <p:style>
-          <a:lnRef idx="1">
-            <a:schemeClr val="accent1"/>
-          </a:lnRef>
-          <a:fillRef idx="3">
-            <a:schemeClr val="accent1"/>
-          </a:fillRef>
-          <a:effectRef idx="2">
-            <a:schemeClr val="accent1"/>
-          </a:effectRef>
-          <a:fontRef idx="minor">
-            <a:schemeClr val="lt1"/>
-          </a:fontRef>
-        </p:style>
-        <p:txBody>
-          <a:bodyPr rtlCol="0" anchor="ctr"/>
-          <a:lstStyle/>
-          <a:p>
-            <a:pPr algn="ctr"/>
-          </a:p>
-        </p:txBody>
-      </p:sp>
-      <p:sp>
-        <p:nvSpPr>
-          <p:cNvPr id="6" name="TextBox 5"/>
-          <p:cNvSpPr txBox="1"/>
-          <p:nvPr/>
-        </p:nvSpPr>
-        <p:spPr>
-          <a:xfrm>
-            <a:off x="786384" y="1755648"/>
-            <a:ext cx="3108960" cy="274320"/>
-          </a:xfrm>
-          <a:prstGeom prst="rect">
-            <a:avLst/>
-          </a:prstGeom>
-          <a:noFill/>
-        </p:spPr>
-        <p:txBody>
-          <a:bodyPr wrap="square" anchor="t" lIns="0" rIns="0" tIns="0" bIns="0">
-            <a:spAutoFit/>
-          </a:bodyPr>
-          <a:lstStyle/>
-          <a:p>
-            <a:pPr algn="l"/>
-            <a:r>
-              <a:rPr sz="1000" b="1">
-                <a:solidFill>
-                  <a:srgbClr val="3A5C9E"/>
-                </a:solidFill>
-              </a:rPr>
-              <a:t>A LIVE STRATEGY TEST · VWAP</a:t>
-            </a:r>
-          </a:p>
-        </p:txBody>
-      </p:sp>
-      <p:sp>
-        <p:nvSpPr>
-          <p:cNvPr id="7" name="TextBox 6"/>
-          <p:cNvSpPr txBox="1"/>
-          <p:nvPr/>
-        </p:nvSpPr>
-        <p:spPr>
-          <a:xfrm>
-            <a:off x="786384" y="2048256"/>
-            <a:ext cx="3108960" cy="365760"/>
-          </a:xfrm>
-          <a:prstGeom prst="rect">
-            <a:avLst/>
-          </a:prstGeom>
-          <a:noFill/>
-        </p:spPr>
-        <p:txBody>
-          <a:bodyPr wrap="square" anchor="t" lIns="0" rIns="0" tIns="0" bIns="0">
-            <a:spAutoFit/>
-          </a:bodyPr>
-          <a:lstStyle/>
-          <a:p>
-            <a:pPr algn="l"/>
-            <a:r>
-              <a:rPr sz="1500" b="1">
-                <a:solidFill>
-                  <a:srgbClr val="0F2145"/>
-                </a:solidFill>
-                <a:latin typeface="Georgia"/>
-              </a:rPr>
-              <a:t>92% wins, and a loss.</a:t>
-            </a:r>
-          </a:p>
-        </p:txBody>
-      </p:sp>
-      <p:sp>
-        <p:nvSpPr>
-          <p:cNvPr id="8" name="TextBox 7"/>
-          <p:cNvSpPr txBox="1"/>
-          <p:nvPr/>
-        </p:nvSpPr>
-        <p:spPr>
-          <a:xfrm>
-            <a:off x="786384" y="2532888"/>
-            <a:ext cx="3108960" cy="1417320"/>
-          </a:xfrm>
-          <a:prstGeom prst="rect">
-            <a:avLst/>
-          </a:prstGeom>
-          <a:noFill/>
-        </p:spPr>
-        <p:txBody>
-          <a:bodyPr wrap="square" anchor="t" lIns="0" rIns="0" tIns="0" bIns="0">
-            <a:spAutoFit/>
-          </a:bodyPr>
-          <a:lstStyle/>
-          <a:p>
-            <a:pPr algn="l"/>
-            <a:r>
-              <a:rPr sz="1000" b="0">
-                <a:solidFill>
-                  <a:srgbClr val="1B2A41"/>
-                </a:solidFill>
-              </a:rPr>
-              <a:t>VWAP is the day's average price weighted by volume. The rule: buy when a stock falls 2% below its VWAP, take profit at +0.20%, stop at −3%, close by 15:20. It ran on 100 F&amp;O stocks from 2019 to 2026, 7,688 trades.</a:t>
-            </a:r>
-          </a:p>
-        </p:txBody>
-      </p:sp>
-      <p:sp>
-        <p:nvSpPr>
-          <p:cNvPr id="9" name="Rectangle 8"/>
-          <p:cNvSpPr/>
-          <p:nvPr/>
-        </p:nvSpPr>
-        <p:spPr>
-          <a:xfrm>
-            <a:off x="786384" y="3968496"/>
-            <a:ext cx="3136392" cy="914400"/>
+            <a:off x="548640" y="1444752"/>
+            <a:ext cx="11091672" cy="676656"/>
           </a:xfrm>
           <a:prstGeom prst="rect">
             <a:avLst/>
@@ -13790,34 +12364,113 @@
       </p:sp>
       <p:sp>
         <p:nvSpPr>
-          <p:cNvPr id="10" name="TextBox 9"/>
-          <p:cNvSpPr txBox="1"/>
-          <p:nvPr/>
-        </p:nvSpPr>
-        <p:spPr>
-          <a:xfrm>
-            <a:off x="950976" y="4059936"/>
-            <a:ext cx="2834640" cy="777240"/>
-          </a:xfrm>
-          <a:prstGeom prst="rect">
-            <a:avLst/>
-          </a:prstGeom>
-          <a:noFill/>
-        </p:spPr>
-        <p:txBody>
-          <a:bodyPr wrap="square" anchor="t" lIns="0" rIns="0" tIns="0" bIns="0">
-            <a:spAutoFit/>
-          </a:bodyPr>
-          <a:lstStyle/>
-          <a:p>
-            <a:pPr algn="l"/>
-            <a:r>
-              <a:rPr sz="800" b="1">
+          <p:cNvPr id="6" name="Rectangle 5"/>
+          <p:cNvSpPr/>
+          <p:nvPr/>
+        </p:nvSpPr>
+        <p:spPr>
+          <a:xfrm>
+            <a:off x="548640" y="1444752"/>
+            <a:ext cx="64008" cy="676656"/>
+          </a:xfrm>
+          <a:prstGeom prst="rect">
+            <a:avLst/>
+          </a:prstGeom>
+          <a:solidFill>
+            <a:srgbClr val="3A5C9E"/>
+          </a:solidFill>
+          <a:ln>
+            <a:noFill/>
+          </a:ln>
+          <a:effectLst/>
+        </p:spPr>
+        <p:style>
+          <a:lnRef idx="1">
+            <a:schemeClr val="accent1"/>
+          </a:lnRef>
+          <a:fillRef idx="3">
+            <a:schemeClr val="accent1"/>
+          </a:fillRef>
+          <a:effectRef idx="2">
+            <a:schemeClr val="accent1"/>
+          </a:effectRef>
+          <a:fontRef idx="minor">
+            <a:schemeClr val="lt1"/>
+          </a:fontRef>
+        </p:style>
+        <p:txBody>
+          <a:bodyPr rtlCol="0" anchor="ctr"/>
+          <a:lstStyle/>
+          <a:p>
+            <a:pPr algn="ctr"/>
+          </a:p>
+        </p:txBody>
+      </p:sp>
+      <p:sp>
+        <p:nvSpPr>
+          <p:cNvPr id="7" name="TextBox 6"/>
+          <p:cNvSpPr txBox="1"/>
+          <p:nvPr/>
+        </p:nvSpPr>
+        <p:spPr>
+          <a:xfrm>
+            <a:off x="822960" y="1508760"/>
+            <a:ext cx="640080" cy="365760"/>
+          </a:xfrm>
+          <a:prstGeom prst="rect">
+            <a:avLst/>
+          </a:prstGeom>
+          <a:noFill/>
+        </p:spPr>
+        <p:txBody>
+          <a:bodyPr wrap="square" anchor="t" lIns="0" rIns="0" tIns="0" bIns="0">
+            <a:spAutoFit/>
+          </a:bodyPr>
+          <a:lstStyle/>
+          <a:p>
+            <a:pPr algn="l"/>
+            <a:r>
+              <a:rPr sz="1400" b="1">
                 <a:solidFill>
                   <a:srgbClr val="3A5C9E"/>
                 </a:solidFill>
-              </a:rPr>
-              <a:t>EXAMPLE</a:t>
+                <a:latin typeface="Georgia"/>
+              </a:rPr>
+              <a:t>Q1</a:t>
+            </a:r>
+          </a:p>
+        </p:txBody>
+      </p:sp>
+      <p:sp>
+        <p:nvSpPr>
+          <p:cNvPr id="8" name="TextBox 7"/>
+          <p:cNvSpPr txBox="1"/>
+          <p:nvPr/>
+        </p:nvSpPr>
+        <p:spPr>
+          <a:xfrm>
+            <a:off x="1554480" y="1499616"/>
+            <a:ext cx="9875520" cy="585216"/>
+          </a:xfrm>
+          <a:prstGeom prst="rect">
+            <a:avLst/>
+          </a:prstGeom>
+          <a:noFill/>
+        </p:spPr>
+        <p:txBody>
+          <a:bodyPr wrap="square" anchor="t" lIns="0" rIns="0" tIns="0" bIns="0">
+            <a:spAutoFit/>
+          </a:bodyPr>
+          <a:lstStyle/>
+          <a:p>
+            <a:pPr algn="l"/>
+            <a:r>
+              <a:rPr sz="1050" b="1">
+                <a:solidFill>
+                  <a:srgbClr val="1B2A41"/>
+                </a:solidFill>
+              </a:rPr>
+              <a:t>Reliance shows bid ₹2,950.00 and ask ₹2,950.50. What does a market buy pay, and what does a limit buy at ₹2,950.00 do?</a:t>
             </a:r>
           </a:p>
           <a:p>
@@ -13827,207 +12480,34 @@
               </a:spcBef>
             </a:pPr>
             <a:r>
-              <a:rPr sz="950" b="0">
-                <a:solidFill>
-                  <a:srgbClr val="1B2A41"/>
-                </a:solidFill>
-              </a:rPr>
-              <a:t>It won 92% of trades and still lost 0.095% per trade after costs. Doing nothing with the same exits already won 83%.</a:t>
-            </a:r>
-          </a:p>
-        </p:txBody>
-      </p:sp>
-      <p:sp>
-        <p:nvSpPr>
-          <p:cNvPr id="11" name="TextBox 10"/>
-          <p:cNvSpPr txBox="1"/>
-          <p:nvPr/>
-        </p:nvSpPr>
-        <p:spPr>
-          <a:xfrm>
-            <a:off x="786384" y="4956048"/>
-            <a:ext cx="3108960" cy="411480"/>
-          </a:xfrm>
-          <a:prstGeom prst="rect">
-            <a:avLst/>
-          </a:prstGeom>
-          <a:noFill/>
-        </p:spPr>
-        <p:txBody>
-          <a:bodyPr wrap="square" anchor="t" lIns="0" rIns="0" tIns="0" bIns="0">
-            <a:spAutoFit/>
-          </a:bodyPr>
-          <a:lstStyle/>
-          <a:p>
-            <a:pPr algn="l"/>
-            <a:r>
-              <a:rPr sz="1000" b="1">
+              <a:rPr sz="900" b="1">
+                <a:solidFill>
+                  <a:srgbClr val="C9A227"/>
+                </a:solidFill>
+              </a:rPr>
+              <a:t>TIP  </a:t>
+            </a:r>
+            <a:r>
+              <a:rPr sz="900" b="0">
                 <a:solidFill>
                   <a:srgbClr val="5D6B7E"/>
                 </a:solidFill>
               </a:rPr>
-              <a:t>The win rate was bought by risking 15 times the target.</a:t>
-            </a:r>
-          </a:p>
-        </p:txBody>
-      </p:sp>
-      <p:sp>
-        <p:nvSpPr>
-          <p:cNvPr id="12" name="Rectangle 11"/>
+              <a:t>The market buy pays ₹2,950.50 now. The limit buy waits at ₹2,950.00 and may never fill.</a:t>
+            </a:r>
+          </a:p>
+        </p:txBody>
+      </p:sp>
+      <p:sp>
+        <p:nvSpPr>
+          <p:cNvPr id="9" name="Rectangle 8"/>
           <p:cNvSpPr/>
           <p:nvPr/>
         </p:nvSpPr>
         <p:spPr>
           <a:xfrm>
-            <a:off x="4315968" y="1572768"/>
-            <a:ext cx="3611880" cy="3840480"/>
-          </a:xfrm>
-          <a:prstGeom prst="rect">
-            <a:avLst/>
-          </a:prstGeom>
-          <a:solidFill>
-            <a:srgbClr val="D5E1F2"/>
-          </a:solidFill>
-          <a:ln>
-            <a:noFill/>
-          </a:ln>
-          <a:effectLst/>
-        </p:spPr>
-        <p:style>
-          <a:lnRef idx="1">
-            <a:schemeClr val="accent1"/>
-          </a:lnRef>
-          <a:fillRef idx="3">
-            <a:schemeClr val="accent1"/>
-          </a:fillRef>
-          <a:effectRef idx="2">
-            <a:schemeClr val="accent1"/>
-          </a:effectRef>
-          <a:fontRef idx="minor">
-            <a:schemeClr val="lt1"/>
-          </a:fontRef>
-        </p:style>
-        <p:txBody>
-          <a:bodyPr rtlCol="0" anchor="ctr"/>
-          <a:lstStyle/>
-          <a:p>
-            <a:pPr algn="ctr"/>
-          </a:p>
-        </p:txBody>
-      </p:sp>
-      <p:sp>
-        <p:nvSpPr>
-          <p:cNvPr id="13" name="TextBox 12"/>
-          <p:cNvSpPr txBox="1"/>
-          <p:nvPr/>
-        </p:nvSpPr>
-        <p:spPr>
-          <a:xfrm>
-            <a:off x="4553712" y="1755648"/>
-            <a:ext cx="3108960" cy="274320"/>
-          </a:xfrm>
-          <a:prstGeom prst="rect">
-            <a:avLst/>
-          </a:prstGeom>
-          <a:noFill/>
-        </p:spPr>
-        <p:txBody>
-          <a:bodyPr wrap="square" anchor="t" lIns="0" rIns="0" tIns="0" bIns="0">
-            <a:spAutoFit/>
-          </a:bodyPr>
-          <a:lstStyle/>
-          <a:p>
-            <a:pPr algn="l"/>
-            <a:r>
-              <a:rPr sz="1000" b="1">
-                <a:solidFill>
-                  <a:srgbClr val="3A5C9E"/>
-                </a:solidFill>
-              </a:rPr>
-              <a:t>HOW THE BOT CONNECTS · UPSTOX API</a:t>
-            </a:r>
-          </a:p>
-        </p:txBody>
-      </p:sp>
-      <p:sp>
-        <p:nvSpPr>
-          <p:cNvPr id="14" name="TextBox 13"/>
-          <p:cNvSpPr txBox="1"/>
-          <p:nvPr/>
-        </p:nvSpPr>
-        <p:spPr>
-          <a:xfrm>
-            <a:off x="4553712" y="2048256"/>
-            <a:ext cx="3108960" cy="365760"/>
-          </a:xfrm>
-          <a:prstGeom prst="rect">
-            <a:avLst/>
-          </a:prstGeom>
-          <a:noFill/>
-        </p:spPr>
-        <p:txBody>
-          <a:bodyPr wrap="square" anchor="t" lIns="0" rIns="0" tIns="0" bIns="0">
-            <a:spAutoFit/>
-          </a:bodyPr>
-          <a:lstStyle/>
-          <a:p>
-            <a:pPr algn="l"/>
-            <a:r>
-              <a:rPr sz="1500" b="1">
-                <a:solidFill>
-                  <a:srgbClr val="0F2145"/>
-                </a:solidFill>
-                <a:latin typeface="Georgia"/>
-              </a:rPr>
-              <a:t>One free token, three calls.</a:t>
-            </a:r>
-          </a:p>
-        </p:txBody>
-      </p:sp>
-      <p:sp>
-        <p:nvSpPr>
-          <p:cNvPr id="15" name="TextBox 14"/>
-          <p:cNvSpPr txBox="1"/>
-          <p:nvPr/>
-        </p:nvSpPr>
-        <p:spPr>
-          <a:xfrm>
-            <a:off x="4553712" y="2532888"/>
-            <a:ext cx="3108960" cy="1417320"/>
-          </a:xfrm>
-          <a:prstGeom prst="rect">
-            <a:avLst/>
-          </a:prstGeom>
-          <a:noFill/>
-        </p:spPr>
-        <p:txBody>
-          <a:bodyPr wrap="square" anchor="t" lIns="0" rIns="0" tIns="0" bIns="0">
-            <a:spAutoFit/>
-          </a:bodyPr>
-          <a:lstStyle/>
-          <a:p>
-            <a:pPr algn="l"/>
-            <a:r>
-              <a:rPr sz="1000" b="0">
-                <a:solidFill>
-                  <a:srgbClr val="1B2A41"/>
-                </a:solidFill>
-              </a:rPr>
-              <a:t>Upstox gives a free read-only Analytics token. It lives in a .env file, never in the code. Every request sends it as a Bearer header to api.upstox.com. We use three calls: last price, intraday candles, daily candles. There is no trading token, so the software cannot place an order.</a:t>
-            </a:r>
-          </a:p>
-        </p:txBody>
-      </p:sp>
-      <p:sp>
-        <p:nvSpPr>
-          <p:cNvPr id="16" name="Rectangle 15"/>
-          <p:cNvSpPr/>
-          <p:nvPr/>
-        </p:nvSpPr>
-        <p:spPr>
-          <a:xfrm>
-            <a:off x="4553712" y="3968496"/>
-            <a:ext cx="3136392" cy="914400"/>
+            <a:off x="548640" y="2176272"/>
+            <a:ext cx="11091672" cy="676656"/>
           </a:xfrm>
           <a:prstGeom prst="rect">
             <a:avLst/>
@@ -14064,34 +12544,113 @@
       </p:sp>
       <p:sp>
         <p:nvSpPr>
-          <p:cNvPr id="17" name="TextBox 16"/>
-          <p:cNvSpPr txBox="1"/>
-          <p:nvPr/>
-        </p:nvSpPr>
-        <p:spPr>
-          <a:xfrm>
-            <a:off x="4718304" y="4059936"/>
-            <a:ext cx="2834640" cy="777240"/>
-          </a:xfrm>
-          <a:prstGeom prst="rect">
-            <a:avLst/>
-          </a:prstGeom>
-          <a:noFill/>
-        </p:spPr>
-        <p:txBody>
-          <a:bodyPr wrap="square" anchor="t" lIns="0" rIns="0" tIns="0" bIns="0">
-            <a:spAutoFit/>
-          </a:bodyPr>
-          <a:lstStyle/>
-          <a:p>
-            <a:pPr algn="l"/>
-            <a:r>
-              <a:rPr sz="800" b="1">
+          <p:cNvPr id="10" name="Rectangle 9"/>
+          <p:cNvSpPr/>
+          <p:nvPr/>
+        </p:nvSpPr>
+        <p:spPr>
+          <a:xfrm>
+            <a:off x="548640" y="2176272"/>
+            <a:ext cx="64008" cy="676656"/>
+          </a:xfrm>
+          <a:prstGeom prst="rect">
+            <a:avLst/>
+          </a:prstGeom>
+          <a:solidFill>
+            <a:srgbClr val="3A5C9E"/>
+          </a:solidFill>
+          <a:ln>
+            <a:noFill/>
+          </a:ln>
+          <a:effectLst/>
+        </p:spPr>
+        <p:style>
+          <a:lnRef idx="1">
+            <a:schemeClr val="accent1"/>
+          </a:lnRef>
+          <a:fillRef idx="3">
+            <a:schemeClr val="accent1"/>
+          </a:fillRef>
+          <a:effectRef idx="2">
+            <a:schemeClr val="accent1"/>
+          </a:effectRef>
+          <a:fontRef idx="minor">
+            <a:schemeClr val="lt1"/>
+          </a:fontRef>
+        </p:style>
+        <p:txBody>
+          <a:bodyPr rtlCol="0" anchor="ctr"/>
+          <a:lstStyle/>
+          <a:p>
+            <a:pPr algn="ctr"/>
+          </a:p>
+        </p:txBody>
+      </p:sp>
+      <p:sp>
+        <p:nvSpPr>
+          <p:cNvPr id="11" name="TextBox 10"/>
+          <p:cNvSpPr txBox="1"/>
+          <p:nvPr/>
+        </p:nvSpPr>
+        <p:spPr>
+          <a:xfrm>
+            <a:off x="822960" y="2240279"/>
+            <a:ext cx="640080" cy="365760"/>
+          </a:xfrm>
+          <a:prstGeom prst="rect">
+            <a:avLst/>
+          </a:prstGeom>
+          <a:noFill/>
+        </p:spPr>
+        <p:txBody>
+          <a:bodyPr wrap="square" anchor="t" lIns="0" rIns="0" tIns="0" bIns="0">
+            <a:spAutoFit/>
+          </a:bodyPr>
+          <a:lstStyle/>
+          <a:p>
+            <a:pPr algn="l"/>
+            <a:r>
+              <a:rPr sz="1400" b="1">
                 <a:solidFill>
                   <a:srgbClr val="3A5C9E"/>
                 </a:solidFill>
-              </a:rPr>
-              <a:t>EXAMPLE</a:t>
+                <a:latin typeface="Georgia"/>
+              </a:rPr>
+              <a:t>Q2</a:t>
+            </a:r>
+          </a:p>
+        </p:txBody>
+      </p:sp>
+      <p:sp>
+        <p:nvSpPr>
+          <p:cNvPr id="12" name="TextBox 11"/>
+          <p:cNvSpPr txBox="1"/>
+          <p:nvPr/>
+        </p:nvSpPr>
+        <p:spPr>
+          <a:xfrm>
+            <a:off x="1554480" y="2231136"/>
+            <a:ext cx="9875520" cy="585216"/>
+          </a:xfrm>
+          <a:prstGeom prst="rect">
+            <a:avLst/>
+          </a:prstGeom>
+          <a:noFill/>
+        </p:spPr>
+        <p:txBody>
+          <a:bodyPr wrap="square" anchor="t" lIns="0" rIns="0" tIns="0" bIns="0">
+            <a:spAutoFit/>
+          </a:bodyPr>
+          <a:lstStyle/>
+          <a:p>
+            <a:pPr algn="l"/>
+            <a:r>
+              <a:rPr sz="1050" b="1">
+                <a:solidFill>
+                  <a:srgbClr val="1B2A41"/>
+                </a:solidFill>
+              </a:rPr>
+              <a:t>Sort these into momentum, mean reversion or pairs: RSI, Bollinger Bands, cointegration.</a:t>
             </a:r>
           </a:p>
           <a:p>
@@ -14101,60 +12660,754 @@
               </a:spcBef>
             </a:pPr>
             <a:r>
-              <a:rPr sz="950" b="0">
+              <a:rPr sz="900" b="1">
+                <a:solidFill>
+                  <a:srgbClr val="C9A227"/>
+                </a:solidFill>
+              </a:rPr>
+              <a:t>TIP  </a:t>
+            </a:r>
+            <a:r>
+              <a:rPr sz="900" b="0">
+                <a:solidFill>
+                  <a:srgbClr val="5D6B7E"/>
+                </a:solidFill>
+              </a:rPr>
+              <a:t>RSI is momentum, Bollinger Bands are mean reversion, cointegration is pairs trading.</a:t>
+            </a:r>
+          </a:p>
+        </p:txBody>
+      </p:sp>
+      <p:sp>
+        <p:nvSpPr>
+          <p:cNvPr id="13" name="Rectangle 12"/>
+          <p:cNvSpPr/>
+          <p:nvPr/>
+        </p:nvSpPr>
+        <p:spPr>
+          <a:xfrm>
+            <a:off x="548640" y="2907791"/>
+            <a:ext cx="11091672" cy="676656"/>
+          </a:xfrm>
+          <a:prstGeom prst="rect">
+            <a:avLst/>
+          </a:prstGeom>
+          <a:solidFill>
+            <a:srgbClr val="FFFFFF"/>
+          </a:solidFill>
+          <a:ln>
+            <a:noFill/>
+          </a:ln>
+          <a:effectLst/>
+        </p:spPr>
+        <p:style>
+          <a:lnRef idx="1">
+            <a:schemeClr val="accent1"/>
+          </a:lnRef>
+          <a:fillRef idx="3">
+            <a:schemeClr val="accent1"/>
+          </a:fillRef>
+          <a:effectRef idx="2">
+            <a:schemeClr val="accent1"/>
+          </a:effectRef>
+          <a:fontRef idx="minor">
+            <a:schemeClr val="lt1"/>
+          </a:fontRef>
+        </p:style>
+        <p:txBody>
+          <a:bodyPr rtlCol="0" anchor="ctr"/>
+          <a:lstStyle/>
+          <a:p>
+            <a:pPr algn="ctr"/>
+          </a:p>
+        </p:txBody>
+      </p:sp>
+      <p:sp>
+        <p:nvSpPr>
+          <p:cNvPr id="14" name="Rectangle 13"/>
+          <p:cNvSpPr/>
+          <p:nvPr/>
+        </p:nvSpPr>
+        <p:spPr>
+          <a:xfrm>
+            <a:off x="548640" y="2907791"/>
+            <a:ext cx="64008" cy="676656"/>
+          </a:xfrm>
+          <a:prstGeom prst="rect">
+            <a:avLst/>
+          </a:prstGeom>
+          <a:solidFill>
+            <a:srgbClr val="3A5C9E"/>
+          </a:solidFill>
+          <a:ln>
+            <a:noFill/>
+          </a:ln>
+          <a:effectLst/>
+        </p:spPr>
+        <p:style>
+          <a:lnRef idx="1">
+            <a:schemeClr val="accent1"/>
+          </a:lnRef>
+          <a:fillRef idx="3">
+            <a:schemeClr val="accent1"/>
+          </a:fillRef>
+          <a:effectRef idx="2">
+            <a:schemeClr val="accent1"/>
+          </a:effectRef>
+          <a:fontRef idx="minor">
+            <a:schemeClr val="lt1"/>
+          </a:fontRef>
+        </p:style>
+        <p:txBody>
+          <a:bodyPr rtlCol="0" anchor="ctr"/>
+          <a:lstStyle/>
+          <a:p>
+            <a:pPr algn="ctr"/>
+          </a:p>
+        </p:txBody>
+      </p:sp>
+      <p:sp>
+        <p:nvSpPr>
+          <p:cNvPr id="15" name="TextBox 14"/>
+          <p:cNvSpPr txBox="1"/>
+          <p:nvPr/>
+        </p:nvSpPr>
+        <p:spPr>
+          <a:xfrm>
+            <a:off x="822960" y="2971799"/>
+            <a:ext cx="640080" cy="365760"/>
+          </a:xfrm>
+          <a:prstGeom prst="rect">
+            <a:avLst/>
+          </a:prstGeom>
+          <a:noFill/>
+        </p:spPr>
+        <p:txBody>
+          <a:bodyPr wrap="square" anchor="t" lIns="0" rIns="0" tIns="0" bIns="0">
+            <a:spAutoFit/>
+          </a:bodyPr>
+          <a:lstStyle/>
+          <a:p>
+            <a:pPr algn="l"/>
+            <a:r>
+              <a:rPr sz="1400" b="1">
+                <a:solidFill>
+                  <a:srgbClr val="3A5C9E"/>
+                </a:solidFill>
+                <a:latin typeface="Georgia"/>
+              </a:rPr>
+              <a:t>Q3</a:t>
+            </a:r>
+          </a:p>
+        </p:txBody>
+      </p:sp>
+      <p:sp>
+        <p:nvSpPr>
+          <p:cNvPr id="16" name="TextBox 15"/>
+          <p:cNvSpPr txBox="1"/>
+          <p:nvPr/>
+        </p:nvSpPr>
+        <p:spPr>
+          <a:xfrm>
+            <a:off x="1554480" y="2962656"/>
+            <a:ext cx="9875520" cy="585216"/>
+          </a:xfrm>
+          <a:prstGeom prst="rect">
+            <a:avLst/>
+          </a:prstGeom>
+          <a:noFill/>
+        </p:spPr>
+        <p:txBody>
+          <a:bodyPr wrap="square" anchor="t" lIns="0" rIns="0" tIns="0" bIns="0">
+            <a:spAutoFit/>
+          </a:bodyPr>
+          <a:lstStyle/>
+          <a:p>
+            <a:pPr algn="l"/>
+            <a:r>
+              <a:rPr sz="1050" b="1">
                 <a:solidFill>
                   <a:srgbClr val="1B2A41"/>
                 </a:solidFill>
               </a:rPr>
-              <a:t>GET /v2/market-quote/ltp with instrument_key NSE_EQ|INE467B01029 returns the TCS price. Upstox keys use the ISIN, not the ticker.</a:t>
-            </a:r>
-          </a:p>
-        </p:txBody>
-      </p:sp>
-      <p:sp>
-        <p:nvSpPr>
-          <p:cNvPr id="18" name="TextBox 17"/>
-          <p:cNvSpPr txBox="1"/>
-          <p:nvPr/>
-        </p:nvSpPr>
-        <p:spPr>
-          <a:xfrm>
-            <a:off x="4553712" y="4956048"/>
-            <a:ext cx="3108960" cy="411480"/>
-          </a:xfrm>
-          <a:prstGeom prst="rect">
-            <a:avLst/>
-          </a:prstGeom>
-          <a:noFill/>
-        </p:spPr>
-        <p:txBody>
-          <a:bodyPr wrap="square" anchor="t" lIns="0" rIns="0" tIns="0" bIns="0">
-            <a:spAutoFit/>
-          </a:bodyPr>
-          <a:lstStyle/>
-          <a:p>
-            <a:pPr algn="l"/>
-            <a:r>
-              <a:rPr sz="1000" b="1">
+              <a:t>Write a trading bot as a goal plus a loop for a 20-day breakout rule.</a:t>
+            </a:r>
+          </a:p>
+          <a:p>
+            <a:pPr algn="l">
+              <a:spcBef>
+                <a:spcPts val="200"/>
+              </a:spcBef>
+            </a:pPr>
+            <a:r>
+              <a:rPr sz="900" b="1">
+                <a:solidFill>
+                  <a:srgbClr val="C9A227"/>
+                </a:solidFill>
+              </a:rPr>
+              <a:t>TIP  </a:t>
+            </a:r>
+            <a:r>
+              <a:rPr sz="900" b="0">
                 <a:solidFill>
                   <a:srgbClr val="5D6B7E"/>
                 </a:solidFill>
               </a:rPr>
-              <a:t>Read-only by design. The order is always yours.</a:t>
-            </a:r>
-          </a:p>
-        </p:txBody>
-      </p:sp>
-      <p:sp>
-        <p:nvSpPr>
-          <p:cNvPr id="19" name="Rectangle 18"/>
+              <a:t>Goal: buy above the 20-day high, sell at +2% or −1%. Loop: each day fetch the close, check the rule, act, log, repeat.</a:t>
+            </a:r>
+          </a:p>
+        </p:txBody>
+      </p:sp>
+      <p:sp>
+        <p:nvSpPr>
+          <p:cNvPr id="17" name="Rectangle 16"/>
           <p:cNvSpPr/>
           <p:nvPr/>
         </p:nvSpPr>
         <p:spPr>
           <a:xfrm>
-            <a:off x="8083296" y="1572768"/>
-            <a:ext cx="3611880" cy="3840480"/>
+            <a:off x="548640" y="3639311"/>
+            <a:ext cx="11091672" cy="676656"/>
+          </a:xfrm>
+          <a:prstGeom prst="rect">
+            <a:avLst/>
+          </a:prstGeom>
+          <a:solidFill>
+            <a:srgbClr val="FFFFFF"/>
+          </a:solidFill>
+          <a:ln>
+            <a:noFill/>
+          </a:ln>
+          <a:effectLst/>
+        </p:spPr>
+        <p:style>
+          <a:lnRef idx="1">
+            <a:schemeClr val="accent1"/>
+          </a:lnRef>
+          <a:fillRef idx="3">
+            <a:schemeClr val="accent1"/>
+          </a:fillRef>
+          <a:effectRef idx="2">
+            <a:schemeClr val="accent1"/>
+          </a:effectRef>
+          <a:fontRef idx="minor">
+            <a:schemeClr val="lt1"/>
+          </a:fontRef>
+        </p:style>
+        <p:txBody>
+          <a:bodyPr rtlCol="0" anchor="ctr"/>
+          <a:lstStyle/>
+          <a:p>
+            <a:pPr algn="ctr"/>
+          </a:p>
+        </p:txBody>
+      </p:sp>
+      <p:sp>
+        <p:nvSpPr>
+          <p:cNvPr id="18" name="Rectangle 17"/>
+          <p:cNvSpPr/>
+          <p:nvPr/>
+        </p:nvSpPr>
+        <p:spPr>
+          <a:xfrm>
+            <a:off x="548640" y="3639311"/>
+            <a:ext cx="64008" cy="676656"/>
+          </a:xfrm>
+          <a:prstGeom prst="rect">
+            <a:avLst/>
+          </a:prstGeom>
+          <a:solidFill>
+            <a:srgbClr val="3A5C9E"/>
+          </a:solidFill>
+          <a:ln>
+            <a:noFill/>
+          </a:ln>
+          <a:effectLst/>
+        </p:spPr>
+        <p:style>
+          <a:lnRef idx="1">
+            <a:schemeClr val="accent1"/>
+          </a:lnRef>
+          <a:fillRef idx="3">
+            <a:schemeClr val="accent1"/>
+          </a:fillRef>
+          <a:effectRef idx="2">
+            <a:schemeClr val="accent1"/>
+          </a:effectRef>
+          <a:fontRef idx="minor">
+            <a:schemeClr val="lt1"/>
+          </a:fontRef>
+        </p:style>
+        <p:txBody>
+          <a:bodyPr rtlCol="0" anchor="ctr"/>
+          <a:lstStyle/>
+          <a:p>
+            <a:pPr algn="ctr"/>
+          </a:p>
+        </p:txBody>
+      </p:sp>
+      <p:sp>
+        <p:nvSpPr>
+          <p:cNvPr id="19" name="TextBox 18"/>
+          <p:cNvSpPr txBox="1"/>
+          <p:nvPr/>
+        </p:nvSpPr>
+        <p:spPr>
+          <a:xfrm>
+            <a:off x="822960" y="3703320"/>
+            <a:ext cx="640080" cy="365760"/>
+          </a:xfrm>
+          <a:prstGeom prst="rect">
+            <a:avLst/>
+          </a:prstGeom>
+          <a:noFill/>
+        </p:spPr>
+        <p:txBody>
+          <a:bodyPr wrap="square" anchor="t" lIns="0" rIns="0" tIns="0" bIns="0">
+            <a:spAutoFit/>
+          </a:bodyPr>
+          <a:lstStyle/>
+          <a:p>
+            <a:pPr algn="l"/>
+            <a:r>
+              <a:rPr sz="1400" b="1">
+                <a:solidFill>
+                  <a:srgbClr val="3A5C9E"/>
+                </a:solidFill>
+                <a:latin typeface="Georgia"/>
+              </a:rPr>
+              <a:t>Q4</a:t>
+            </a:r>
+          </a:p>
+        </p:txBody>
+      </p:sp>
+      <p:sp>
+        <p:nvSpPr>
+          <p:cNvPr id="20" name="TextBox 19"/>
+          <p:cNvSpPr txBox="1"/>
+          <p:nvPr/>
+        </p:nvSpPr>
+        <p:spPr>
+          <a:xfrm>
+            <a:off x="1554480" y="3694175"/>
+            <a:ext cx="9875520" cy="585216"/>
+          </a:xfrm>
+          <a:prstGeom prst="rect">
+            <a:avLst/>
+          </a:prstGeom>
+          <a:noFill/>
+        </p:spPr>
+        <p:txBody>
+          <a:bodyPr wrap="square" anchor="t" lIns="0" rIns="0" tIns="0" bIns="0">
+            <a:spAutoFit/>
+          </a:bodyPr>
+          <a:lstStyle/>
+          <a:p>
+            <a:pPr algn="l"/>
+            <a:r>
+              <a:rPr sz="1050" b="1">
+                <a:solidFill>
+                  <a:srgbClr val="1B2A41"/>
+                </a:solidFill>
+              </a:rPr>
+              <a:t>A rule wins 80% in-sample and 55% out-of-sample. What happened, and what do you report?</a:t>
+            </a:r>
+          </a:p>
+          <a:p>
+            <a:pPr algn="l">
+              <a:spcBef>
+                <a:spcPts val="200"/>
+              </a:spcBef>
+            </a:pPr>
+            <a:r>
+              <a:rPr sz="900" b="1">
+                <a:solidFill>
+                  <a:srgbClr val="C9A227"/>
+                </a:solidFill>
+              </a:rPr>
+              <a:t>TIP  </a:t>
+            </a:r>
+            <a:r>
+              <a:rPr sz="900" b="0">
+                <a:solidFill>
+                  <a:srgbClr val="5D6B7E"/>
+                </a:solidFill>
+              </a:rPr>
+              <a:t>It was overfitted. Report the out-of-sample number, the costs and the drawdown, and do not trade it yet.</a:t>
+            </a:r>
+          </a:p>
+        </p:txBody>
+      </p:sp>
+      <p:sp>
+        <p:nvSpPr>
+          <p:cNvPr id="21" name="Rectangle 20"/>
+          <p:cNvSpPr/>
+          <p:nvPr/>
+        </p:nvSpPr>
+        <p:spPr>
+          <a:xfrm>
+            <a:off x="548640" y="4370831"/>
+            <a:ext cx="11091672" cy="676656"/>
+          </a:xfrm>
+          <a:prstGeom prst="rect">
+            <a:avLst/>
+          </a:prstGeom>
+          <a:solidFill>
+            <a:srgbClr val="FFFFFF"/>
+          </a:solidFill>
+          <a:ln>
+            <a:noFill/>
+          </a:ln>
+          <a:effectLst/>
+        </p:spPr>
+        <p:style>
+          <a:lnRef idx="1">
+            <a:schemeClr val="accent1"/>
+          </a:lnRef>
+          <a:fillRef idx="3">
+            <a:schemeClr val="accent1"/>
+          </a:fillRef>
+          <a:effectRef idx="2">
+            <a:schemeClr val="accent1"/>
+          </a:effectRef>
+          <a:fontRef idx="minor">
+            <a:schemeClr val="lt1"/>
+          </a:fontRef>
+        </p:style>
+        <p:txBody>
+          <a:bodyPr rtlCol="0" anchor="ctr"/>
+          <a:lstStyle/>
+          <a:p>
+            <a:pPr algn="ctr"/>
+          </a:p>
+        </p:txBody>
+      </p:sp>
+      <p:sp>
+        <p:nvSpPr>
+          <p:cNvPr id="22" name="Rectangle 21"/>
+          <p:cNvSpPr/>
+          <p:nvPr/>
+        </p:nvSpPr>
+        <p:spPr>
+          <a:xfrm>
+            <a:off x="548640" y="4370831"/>
+            <a:ext cx="64008" cy="676656"/>
+          </a:xfrm>
+          <a:prstGeom prst="rect">
+            <a:avLst/>
+          </a:prstGeom>
+          <a:solidFill>
+            <a:srgbClr val="3A5C9E"/>
+          </a:solidFill>
+          <a:ln>
+            <a:noFill/>
+          </a:ln>
+          <a:effectLst/>
+        </p:spPr>
+        <p:style>
+          <a:lnRef idx="1">
+            <a:schemeClr val="accent1"/>
+          </a:lnRef>
+          <a:fillRef idx="3">
+            <a:schemeClr val="accent1"/>
+          </a:fillRef>
+          <a:effectRef idx="2">
+            <a:schemeClr val="accent1"/>
+          </a:effectRef>
+          <a:fontRef idx="minor">
+            <a:schemeClr val="lt1"/>
+          </a:fontRef>
+        </p:style>
+        <p:txBody>
+          <a:bodyPr rtlCol="0" anchor="ctr"/>
+          <a:lstStyle/>
+          <a:p>
+            <a:pPr algn="ctr"/>
+          </a:p>
+        </p:txBody>
+      </p:sp>
+      <p:sp>
+        <p:nvSpPr>
+          <p:cNvPr id="23" name="TextBox 22"/>
+          <p:cNvSpPr txBox="1"/>
+          <p:nvPr/>
+        </p:nvSpPr>
+        <p:spPr>
+          <a:xfrm>
+            <a:off x="822960" y="4434840"/>
+            <a:ext cx="640080" cy="365760"/>
+          </a:xfrm>
+          <a:prstGeom prst="rect">
+            <a:avLst/>
+          </a:prstGeom>
+          <a:noFill/>
+        </p:spPr>
+        <p:txBody>
+          <a:bodyPr wrap="square" anchor="t" lIns="0" rIns="0" tIns="0" bIns="0">
+            <a:spAutoFit/>
+          </a:bodyPr>
+          <a:lstStyle/>
+          <a:p>
+            <a:pPr algn="l"/>
+            <a:r>
+              <a:rPr sz="1400" b="1">
+                <a:solidFill>
+                  <a:srgbClr val="3A5C9E"/>
+                </a:solidFill>
+                <a:latin typeface="Georgia"/>
+              </a:rPr>
+              <a:t>Q5</a:t>
+            </a:r>
+          </a:p>
+        </p:txBody>
+      </p:sp>
+      <p:sp>
+        <p:nvSpPr>
+          <p:cNvPr id="24" name="TextBox 23"/>
+          <p:cNvSpPr txBox="1"/>
+          <p:nvPr/>
+        </p:nvSpPr>
+        <p:spPr>
+          <a:xfrm>
+            <a:off x="1554480" y="4425695"/>
+            <a:ext cx="9875520" cy="585216"/>
+          </a:xfrm>
+          <a:prstGeom prst="rect">
+            <a:avLst/>
+          </a:prstGeom>
+          <a:noFill/>
+        </p:spPr>
+        <p:txBody>
+          <a:bodyPr wrap="square" anchor="t" lIns="0" rIns="0" tIns="0" bIns="0">
+            <a:spAutoFit/>
+          </a:bodyPr>
+          <a:lstStyle/>
+          <a:p>
+            <a:pPr algn="l"/>
+            <a:r>
+              <a:rPr sz="1050" b="1">
+                <a:solidFill>
+                  <a:srgbClr val="1B2A41"/>
+                </a:solidFill>
+              </a:rPr>
+              <a:t>Two rules both earn 18% a year. One had a 12% max drawdown, the other 40%. Which would you hold, and which number tells you?</a:t>
+            </a:r>
+          </a:p>
+          <a:p>
+            <a:pPr algn="l">
+              <a:spcBef>
+                <a:spcPts val="200"/>
+              </a:spcBef>
+            </a:pPr>
+            <a:r>
+              <a:rPr sz="900" b="1">
+                <a:solidFill>
+                  <a:srgbClr val="C9A227"/>
+                </a:solidFill>
+              </a:rPr>
+              <a:t>TIP  </a:t>
+            </a:r>
+            <a:r>
+              <a:rPr sz="900" b="0">
+                <a:solidFill>
+                  <a:srgbClr val="5D6B7E"/>
+                </a:solidFill>
+              </a:rPr>
+              <a:t>The 12% one. Max drawdown is the worst fall an investor has to sit through: same return, a third of the pain.</a:t>
+            </a:r>
+          </a:p>
+        </p:txBody>
+      </p:sp>
+      <p:sp>
+        <p:nvSpPr>
+          <p:cNvPr id="25" name="Rectangle 24"/>
+          <p:cNvSpPr/>
+          <p:nvPr/>
+        </p:nvSpPr>
+        <p:spPr>
+          <a:xfrm>
+            <a:off x="548640" y="5102351"/>
+            <a:ext cx="11091672" cy="676656"/>
+          </a:xfrm>
+          <a:prstGeom prst="rect">
+            <a:avLst/>
+          </a:prstGeom>
+          <a:solidFill>
+            <a:srgbClr val="FFFFFF"/>
+          </a:solidFill>
+          <a:ln>
+            <a:noFill/>
+          </a:ln>
+          <a:effectLst/>
+        </p:spPr>
+        <p:style>
+          <a:lnRef idx="1">
+            <a:schemeClr val="accent1"/>
+          </a:lnRef>
+          <a:fillRef idx="3">
+            <a:schemeClr val="accent1"/>
+          </a:fillRef>
+          <a:effectRef idx="2">
+            <a:schemeClr val="accent1"/>
+          </a:effectRef>
+          <a:fontRef idx="minor">
+            <a:schemeClr val="lt1"/>
+          </a:fontRef>
+        </p:style>
+        <p:txBody>
+          <a:bodyPr rtlCol="0" anchor="ctr"/>
+          <a:lstStyle/>
+          <a:p>
+            <a:pPr algn="ctr"/>
+          </a:p>
+        </p:txBody>
+      </p:sp>
+      <p:sp>
+        <p:nvSpPr>
+          <p:cNvPr id="26" name="Rectangle 25"/>
+          <p:cNvSpPr/>
+          <p:nvPr/>
+        </p:nvSpPr>
+        <p:spPr>
+          <a:xfrm>
+            <a:off x="548640" y="5102351"/>
+            <a:ext cx="64008" cy="676656"/>
+          </a:xfrm>
+          <a:prstGeom prst="rect">
+            <a:avLst/>
+          </a:prstGeom>
+          <a:solidFill>
+            <a:srgbClr val="3A5C9E"/>
+          </a:solidFill>
+          <a:ln>
+            <a:noFill/>
+          </a:ln>
+          <a:effectLst/>
+        </p:spPr>
+        <p:style>
+          <a:lnRef idx="1">
+            <a:schemeClr val="accent1"/>
+          </a:lnRef>
+          <a:fillRef idx="3">
+            <a:schemeClr val="accent1"/>
+          </a:fillRef>
+          <a:effectRef idx="2">
+            <a:schemeClr val="accent1"/>
+          </a:effectRef>
+          <a:fontRef idx="minor">
+            <a:schemeClr val="lt1"/>
+          </a:fontRef>
+        </p:style>
+        <p:txBody>
+          <a:bodyPr rtlCol="0" anchor="ctr"/>
+          <a:lstStyle/>
+          <a:p>
+            <a:pPr algn="ctr"/>
+          </a:p>
+        </p:txBody>
+      </p:sp>
+      <p:sp>
+        <p:nvSpPr>
+          <p:cNvPr id="27" name="TextBox 26"/>
+          <p:cNvSpPr txBox="1"/>
+          <p:nvPr/>
+        </p:nvSpPr>
+        <p:spPr>
+          <a:xfrm>
+            <a:off x="822960" y="5166359"/>
+            <a:ext cx="640080" cy="365760"/>
+          </a:xfrm>
+          <a:prstGeom prst="rect">
+            <a:avLst/>
+          </a:prstGeom>
+          <a:noFill/>
+        </p:spPr>
+        <p:txBody>
+          <a:bodyPr wrap="square" anchor="t" lIns="0" rIns="0" tIns="0" bIns="0">
+            <a:spAutoFit/>
+          </a:bodyPr>
+          <a:lstStyle/>
+          <a:p>
+            <a:pPr algn="l"/>
+            <a:r>
+              <a:rPr sz="1400" b="1">
+                <a:solidFill>
+                  <a:srgbClr val="3A5C9E"/>
+                </a:solidFill>
+                <a:latin typeface="Georgia"/>
+              </a:rPr>
+              <a:t>Q6</a:t>
+            </a:r>
+          </a:p>
+        </p:txBody>
+      </p:sp>
+      <p:sp>
+        <p:nvSpPr>
+          <p:cNvPr id="28" name="TextBox 27"/>
+          <p:cNvSpPr txBox="1"/>
+          <p:nvPr/>
+        </p:nvSpPr>
+        <p:spPr>
+          <a:xfrm>
+            <a:off x="1554480" y="5157215"/>
+            <a:ext cx="9875520" cy="585216"/>
+          </a:xfrm>
+          <a:prstGeom prst="rect">
+            <a:avLst/>
+          </a:prstGeom>
+          <a:noFill/>
+        </p:spPr>
+        <p:txBody>
+          <a:bodyPr wrap="square" anchor="t" lIns="0" rIns="0" tIns="0" bIns="0">
+            <a:spAutoFit/>
+          </a:bodyPr>
+          <a:lstStyle/>
+          <a:p>
+            <a:pPr algn="l"/>
+            <a:r>
+              <a:rPr sz="1050" b="1">
+                <a:solidFill>
+                  <a:srgbClr val="1B2A41"/>
+                </a:solidFill>
+              </a:rPr>
+              <a:t>What did Knight Capital's failure teach about deploying a bot, and what one control would have saved it?</a:t>
+            </a:r>
+          </a:p>
+          <a:p>
+            <a:pPr algn="l">
+              <a:spcBef>
+                <a:spcPts val="200"/>
+              </a:spcBef>
+            </a:pPr>
+            <a:r>
+              <a:rPr sz="900" b="1">
+                <a:solidFill>
+                  <a:srgbClr val="C9A227"/>
+                </a:solidFill>
+              </a:rPr>
+              <a:t>TIP  </a:t>
+            </a:r>
+            <a:r>
+              <a:rPr sz="900" b="0">
+                <a:solidFill>
+                  <a:srgbClr val="5D6B7E"/>
+                </a:solidFill>
+              </a:rPr>
+              <a:t>The bug was a bad deploy on one server, not the strategy. A kill switch that a human can reach within minutes.</a:t>
+            </a:r>
+          </a:p>
+        </p:txBody>
+      </p:sp>
+      <p:sp>
+        <p:nvSpPr>
+          <p:cNvPr id="29" name="Rectangle 28"/>
+          <p:cNvSpPr/>
+          <p:nvPr/>
+        </p:nvSpPr>
+        <p:spPr>
+          <a:xfrm>
+            <a:off x="548640" y="5870448"/>
+            <a:ext cx="11091672" cy="512064"/>
           </a:xfrm>
           <a:prstGeom prst="rect">
             <a:avLst/>
@@ -14191,288 +13444,14 @@
       </p:sp>
       <p:sp>
         <p:nvSpPr>
-          <p:cNvPr id="20" name="TextBox 19"/>
-          <p:cNvSpPr txBox="1"/>
-          <p:nvPr/>
-        </p:nvSpPr>
-        <p:spPr>
-          <a:xfrm>
-            <a:off x="8321040" y="1755648"/>
-            <a:ext cx="3108960" cy="274320"/>
-          </a:xfrm>
-          <a:prstGeom prst="rect">
-            <a:avLst/>
-          </a:prstGeom>
-          <a:noFill/>
-        </p:spPr>
-        <p:txBody>
-          <a:bodyPr wrap="square" anchor="t" lIns="0" rIns="0" tIns="0" bIns="0">
-            <a:spAutoFit/>
-          </a:bodyPr>
-          <a:lstStyle/>
-          <a:p>
-            <a:pPr algn="l"/>
-            <a:r>
-              <a:rPr sz="1000" b="1">
-                <a:solidFill>
-                  <a:srgbClr val="C9A227"/>
-                </a:solidFill>
-              </a:rPr>
-              <a:t>THE CHART · TRADINGVIEW</a:t>
-            </a:r>
-          </a:p>
-        </p:txBody>
-      </p:sp>
-      <p:sp>
-        <p:nvSpPr>
-          <p:cNvPr id="21" name="TextBox 20"/>
-          <p:cNvSpPr txBox="1"/>
-          <p:nvPr/>
-        </p:nvSpPr>
-        <p:spPr>
-          <a:xfrm>
-            <a:off x="8321040" y="2048256"/>
-            <a:ext cx="3108960" cy="365760"/>
-          </a:xfrm>
-          <a:prstGeom prst="rect">
-            <a:avLst/>
-          </a:prstGeom>
-          <a:noFill/>
-        </p:spPr>
-        <p:txBody>
-          <a:bodyPr wrap="square" anchor="t" lIns="0" rIns="0" tIns="0" bIns="0">
-            <a:spAutoFit/>
-          </a:bodyPr>
-          <a:lstStyle/>
-          <a:p>
-            <a:pPr algn="l"/>
-            <a:r>
-              <a:rPr sz="1500" b="1">
-                <a:solidFill>
-                  <a:srgbClr val="FFFFFF"/>
-                </a:solidFill>
-                <a:latin typeface="Georgia"/>
-              </a:rPr>
-              <a:t>Claude Code drives the chart.</a:t>
-            </a:r>
-          </a:p>
-        </p:txBody>
-      </p:sp>
-      <p:sp>
-        <p:nvSpPr>
-          <p:cNvPr id="22" name="TextBox 21"/>
-          <p:cNvSpPr txBox="1"/>
-          <p:nvPr/>
-        </p:nvSpPr>
-        <p:spPr>
-          <a:xfrm>
-            <a:off x="8321040" y="2532888"/>
-            <a:ext cx="3108960" cy="1417320"/>
-          </a:xfrm>
-          <a:prstGeom prst="rect">
-            <a:avLst/>
-          </a:prstGeom>
-          <a:noFill/>
-        </p:spPr>
-        <p:txBody>
-          <a:bodyPr wrap="square" anchor="t" lIns="0" rIns="0" tIns="0" bIns="0">
-            <a:spAutoFit/>
-          </a:bodyPr>
-          <a:lstStyle/>
-          <a:p>
-            <a:pPr algn="l"/>
-            <a:r>
-              <a:rPr sz="1000" b="0">
-                <a:solidFill>
-                  <a:srgbClr val="C9D6EE"/>
-                </a:solidFill>
-              </a:rPr>
-              <a:t>TradingView Desktop is connected to Claude Code through an MCP server, the plug from Module 3. One script reads the last 300 bars off the open chart, finds support and resistance from swing highs and lows, draws the zones, and pops a notification when price comes within 0.15% of one.</a:t>
-            </a:r>
-          </a:p>
-        </p:txBody>
-      </p:sp>
-      <p:sp>
-        <p:nvSpPr>
-          <p:cNvPr id="23" name="Rectangle 22"/>
+          <p:cNvPr id="30" name="Rectangle 29"/>
           <p:cNvSpPr/>
           <p:nvPr/>
         </p:nvSpPr>
         <p:spPr>
           <a:xfrm>
-            <a:off x="8321040" y="3968496"/>
-            <a:ext cx="3136392" cy="914400"/>
-          </a:xfrm>
-          <a:prstGeom prst="rect">
-            <a:avLst/>
-          </a:prstGeom>
-          <a:solidFill>
-            <a:srgbClr val="FFFFFF"/>
-          </a:solidFill>
-          <a:ln>
-            <a:noFill/>
-          </a:ln>
-          <a:effectLst/>
-        </p:spPr>
-        <p:style>
-          <a:lnRef idx="1">
-            <a:schemeClr val="accent1"/>
-          </a:lnRef>
-          <a:fillRef idx="3">
-            <a:schemeClr val="accent1"/>
-          </a:fillRef>
-          <a:effectRef idx="2">
-            <a:schemeClr val="accent1"/>
-          </a:effectRef>
-          <a:fontRef idx="minor">
-            <a:schemeClr val="lt1"/>
-          </a:fontRef>
-        </p:style>
-        <p:txBody>
-          <a:bodyPr rtlCol="0" anchor="ctr"/>
-          <a:lstStyle/>
-          <a:p>
-            <a:pPr algn="ctr"/>
-          </a:p>
-        </p:txBody>
-      </p:sp>
-      <p:sp>
-        <p:nvSpPr>
-          <p:cNvPr id="24" name="TextBox 23"/>
-          <p:cNvSpPr txBox="1"/>
-          <p:nvPr/>
-        </p:nvSpPr>
-        <p:spPr>
-          <a:xfrm>
-            <a:off x="8485632" y="4059936"/>
-            <a:ext cx="2834640" cy="777240"/>
-          </a:xfrm>
-          <a:prstGeom prst="rect">
-            <a:avLst/>
-          </a:prstGeom>
-          <a:noFill/>
-        </p:spPr>
-        <p:txBody>
-          <a:bodyPr wrap="square" anchor="t" lIns="0" rIns="0" tIns="0" bIns="0">
-            <a:spAutoFit/>
-          </a:bodyPr>
-          <a:lstStyle/>
-          <a:p>
-            <a:pPr algn="l"/>
-            <a:r>
-              <a:rPr sz="800" b="1">
-                <a:solidFill>
-                  <a:srgbClr val="3A5C9E"/>
-                </a:solidFill>
-              </a:rPr>
-              <a:t>EXAMPLE</a:t>
-            </a:r>
-          </a:p>
-          <a:p>
-            <a:pPr algn="l">
-              <a:spcBef>
-                <a:spcPts val="200"/>
-              </a:spcBef>
-            </a:pPr>
-            <a:r>
-              <a:rPr sz="950" b="0">
-                <a:solidFill>
-                  <a:srgbClr val="1B2A41"/>
-                </a:solidFill>
-              </a:rPr>
-              <a:t>node sr.mjs --symbol NSE:NIFTY --watch. The chart is the data source, and the loop polls it every 60 seconds.</a:t>
-            </a:r>
-          </a:p>
-        </p:txBody>
-      </p:sp>
-      <p:sp>
-        <p:nvSpPr>
-          <p:cNvPr id="25" name="TextBox 24"/>
-          <p:cNvSpPr txBox="1"/>
-          <p:nvPr/>
-        </p:nvSpPr>
-        <p:spPr>
-          <a:xfrm>
-            <a:off x="8321040" y="4956048"/>
-            <a:ext cx="3108960" cy="411480"/>
-          </a:xfrm>
-          <a:prstGeom prst="rect">
-            <a:avLst/>
-          </a:prstGeom>
-          <a:noFill/>
-        </p:spPr>
-        <p:txBody>
-          <a:bodyPr wrap="square" anchor="t" lIns="0" rIns="0" tIns="0" bIns="0">
-            <a:spAutoFit/>
-          </a:bodyPr>
-          <a:lstStyle/>
-          <a:p>
-            <a:pPr algn="l"/>
-            <a:r>
-              <a:rPr sz="1000" b="1">
-                <a:solidFill>
-                  <a:srgbClr val="C9D6EE"/>
-                </a:solidFill>
-              </a:rPr>
-              <a:t>Same idea again: a goal, a loop, and a data plug.</a:t>
-            </a:r>
-          </a:p>
-        </p:txBody>
-      </p:sp>
-      <p:sp>
-        <p:nvSpPr>
-          <p:cNvPr id="26" name="Rectangle 25"/>
-          <p:cNvSpPr/>
-          <p:nvPr/>
-        </p:nvSpPr>
-        <p:spPr>
-          <a:xfrm>
-            <a:off x="548640" y="5760720"/>
-            <a:ext cx="11091672" cy="603504"/>
-          </a:xfrm>
-          <a:prstGeom prst="rect">
-            <a:avLst/>
-          </a:prstGeom>
-          <a:solidFill>
-            <a:srgbClr val="0F2145"/>
-          </a:solidFill>
-          <a:ln>
-            <a:noFill/>
-          </a:ln>
-          <a:effectLst/>
-        </p:spPr>
-        <p:style>
-          <a:lnRef idx="1">
-            <a:schemeClr val="accent1"/>
-          </a:lnRef>
-          <a:fillRef idx="3">
-            <a:schemeClr val="accent1"/>
-          </a:fillRef>
-          <a:effectRef idx="2">
-            <a:schemeClr val="accent1"/>
-          </a:effectRef>
-          <a:fontRef idx="minor">
-            <a:schemeClr val="lt1"/>
-          </a:fontRef>
-        </p:style>
-        <p:txBody>
-          <a:bodyPr rtlCol="0" anchor="ctr"/>
-          <a:lstStyle/>
-          <a:p>
-            <a:pPr algn="ctr"/>
-          </a:p>
-        </p:txBody>
-      </p:sp>
-      <p:sp>
-        <p:nvSpPr>
-          <p:cNvPr id="27" name="Rectangle 26"/>
-          <p:cNvSpPr/>
-          <p:nvPr/>
-        </p:nvSpPr>
-        <p:spPr>
-          <a:xfrm>
-            <a:off x="548640" y="5760720"/>
-            <a:ext cx="64008" cy="603504"/>
+            <a:off x="548640" y="5870448"/>
+            <a:ext cx="64008" cy="512064"/>
           </a:xfrm>
           <a:prstGeom prst="rect">
             <a:avLst/>
@@ -14509,14 +13488,14 @@
       </p:sp>
       <p:sp>
         <p:nvSpPr>
-          <p:cNvPr id="28" name="TextBox 27"/>
-          <p:cNvSpPr txBox="1"/>
-          <p:nvPr/>
-        </p:nvSpPr>
-        <p:spPr>
-          <a:xfrm>
-            <a:off x="822960" y="5760720"/>
-            <a:ext cx="10543032" cy="603504"/>
+          <p:cNvPr id="31" name="TextBox 30"/>
+          <p:cNvSpPr txBox="1"/>
+          <p:nvPr/>
+        </p:nvSpPr>
+        <p:spPr>
+          <a:xfrm>
+            <a:off x="822960" y="5870448"/>
+            <a:ext cx="10515600" cy="512064"/>
           </a:xfrm>
           <a:prstGeom prst="rect">
             <a:avLst/>
@@ -14531,34 +13510,34 @@
           <a:p>
             <a:pPr algn="l"/>
             <a:r>
-              <a:rPr sz="1200" b="1">
+              <a:rPr sz="1100" b="1">
                 <a:solidFill>
                   <a:srgbClr val="C9A227"/>
                 </a:solidFill>
               </a:rPr>
-              <a:t>What Saavi shows:  </a:t>
-            </a:r>
-            <a:r>
-              <a:rPr sz="1200" b="0">
+              <a:t>Before Session 5:  </a:t>
+            </a:r>
+            <a:r>
+              <a:rPr sz="1100" b="0">
                 <a:solidFill>
                   <a:srgbClr val="FFFFFF"/>
                 </a:solidFill>
               </a:rPr>
-              <a:t>the test says no, the API stays read-only, and the chart is one more tool on the MCP menu.</a:t>
-            </a:r>
-          </a:p>
-        </p:txBody>
-      </p:sp>
-      <p:sp>
-        <p:nvSpPr>
-          <p:cNvPr id="29" name="TextBox 28"/>
+              <a:t>write one trading rule in one sentence, and list the three numbers you would need before you trust it.</a:t>
+            </a:r>
+          </a:p>
+        </p:txBody>
+      </p:sp>
+      <p:sp>
+        <p:nvSpPr>
+          <p:cNvPr id="32" name="TextBox 31"/>
           <p:cNvSpPr txBox="1"/>
           <p:nvPr/>
         </p:nvSpPr>
         <p:spPr>
           <a:xfrm>
             <a:off x="548640" y="6473952"/>
-            <a:ext cx="7315200" cy="228600"/>
+            <a:ext cx="8229600" cy="228600"/>
           </a:xfrm>
           <a:prstGeom prst="rect">
             <a:avLst/>
@@ -14578,14 +13557,14 @@
                   <a:srgbClr val="5D6B7E"/>
                 </a:solidFill>
               </a:rPr>
-              <a:t>ISBMS · PGDM 2025–27 · AGENTIC AI &amp; ADVANCED ANALYTICS IN FINANCE</a:t>
-            </a:r>
-          </a:p>
-        </p:txBody>
-      </p:sp>
-      <p:sp>
-        <p:nvSpPr>
-          <p:cNvPr id="30" name="TextBox 29"/>
+              <a:t>The tip is the shape of the answer, not the whole answer. Two or three sentences each in the exam.</a:t>
+            </a:r>
+          </a:p>
+        </p:txBody>
+      </p:sp>
+      <p:sp>
+        <p:nvSpPr>
+          <p:cNvPr id="33" name="TextBox 32"/>
           <p:cNvSpPr txBox="1"/>
           <p:nvPr/>
         </p:nvSpPr>
@@ -14613,1293 +13592,6 @@
                 </a:solidFill>
               </a:rPr>
               <a:t>MODULE 4  ·  08</a:t>
-            </a:r>
-          </a:p>
-        </p:txBody>
-      </p:sp>
-    </p:spTree>
-  </p:cSld>
-  <p:clrMapOvr>
-    <a:masterClrMapping/>
-  </p:clrMapOvr>
-</p:sld>
-</file>
-
-<file path=ppt/slides/slide9.xml><?xml version="1.0" encoding="utf-8"?>
-<p:sld xmlns:a="http://schemas.openxmlformats.org/drawingml/2006/main" xmlns:p="http://schemas.openxmlformats.org/presentationml/2006/main" xmlns:r="http://schemas.openxmlformats.org/officeDocument/2006/relationships">
-  <p:cSld>
-    <p:bg>
-      <p:bgPr>
-        <a:solidFill>
-          <a:srgbClr val="F7F8FA"/>
-        </a:solidFill>
-        <a:effectLst/>
-      </p:bgPr>
-    </p:bg>
-    <p:spTree>
-      <p:nvGrpSpPr>
-        <p:cNvPr id="1" name=""/>
-        <p:cNvGrpSpPr/>
-        <p:nvPr/>
-      </p:nvGrpSpPr>
-      <p:grpSpPr/>
-      <p:sp>
-        <p:nvSpPr>
-          <p:cNvPr id="2" name="Rectangle 1"/>
-          <p:cNvSpPr/>
-          <p:nvPr/>
-        </p:nvSpPr>
-        <p:spPr>
-          <a:xfrm>
-            <a:off x="548640" y="402336"/>
-            <a:ext cx="118872" cy="118872"/>
-          </a:xfrm>
-          <a:prstGeom prst="rect">
-            <a:avLst/>
-          </a:prstGeom>
-          <a:solidFill>
-            <a:srgbClr val="C9A227"/>
-          </a:solidFill>
-          <a:ln>
-            <a:noFill/>
-          </a:ln>
-          <a:effectLst/>
-        </p:spPr>
-        <p:style>
-          <a:lnRef idx="1">
-            <a:schemeClr val="accent1"/>
-          </a:lnRef>
-          <a:fillRef idx="3">
-            <a:schemeClr val="accent1"/>
-          </a:fillRef>
-          <a:effectRef idx="2">
-            <a:schemeClr val="accent1"/>
-          </a:effectRef>
-          <a:fontRef idx="minor">
-            <a:schemeClr val="lt1"/>
-          </a:fontRef>
-        </p:style>
-        <p:txBody>
-          <a:bodyPr rtlCol="0" anchor="ctr"/>
-          <a:lstStyle/>
-          <a:p>
-            <a:pPr algn="ctr"/>
-          </a:p>
-        </p:txBody>
-      </p:sp>
-      <p:sp>
-        <p:nvSpPr>
-          <p:cNvPr id="3" name="TextBox 2"/>
-          <p:cNvSpPr txBox="1"/>
-          <p:nvPr/>
-        </p:nvSpPr>
-        <p:spPr>
-          <a:xfrm>
-            <a:off x="786384" y="310896"/>
-            <a:ext cx="10817352" cy="274320"/>
-          </a:xfrm>
-          <a:prstGeom prst="rect">
-            <a:avLst/>
-          </a:prstGeom>
-          <a:noFill/>
-        </p:spPr>
-        <p:txBody>
-          <a:bodyPr wrap="square" anchor="t" lIns="0" rIns="0" tIns="0" bIns="0">
-            <a:spAutoFit/>
-          </a:bodyPr>
-          <a:lstStyle/>
-          <a:p>
-            <a:pPr algn="l"/>
-            <a:r>
-              <a:rPr sz="1100" b="1">
-                <a:solidFill>
-                  <a:srgbClr val="C9A227"/>
-                </a:solidFill>
-              </a:rPr>
-              <a:t>HOUR 3 · IN-CLASS LAB</a:t>
-            </a:r>
-          </a:p>
-        </p:txBody>
-      </p:sp>
-      <p:sp>
-        <p:nvSpPr>
-          <p:cNvPr id="4" name="TextBox 3"/>
-          <p:cNvSpPr txBox="1"/>
-          <p:nvPr/>
-        </p:nvSpPr>
-        <p:spPr>
-          <a:xfrm>
-            <a:off x="548640" y="621792"/>
-            <a:ext cx="11091672" cy="731520"/>
-          </a:xfrm>
-          <a:prstGeom prst="rect">
-            <a:avLst/>
-          </a:prstGeom>
-          <a:noFill/>
-        </p:spPr>
-        <p:txBody>
-          <a:bodyPr wrap="square" anchor="t" lIns="0" rIns="0" tIns="0" bIns="0">
-            <a:spAutoFit/>
-          </a:bodyPr>
-          <a:lstStyle/>
-          <a:p>
-            <a:pPr algn="l"/>
-            <a:r>
-              <a:rPr sz="2900" b="1">
-                <a:solidFill>
-                  <a:srgbClr val="0F2145"/>
-                </a:solidFill>
-                <a:latin typeface="Georgia"/>
-              </a:rPr>
-              <a:t>The lab: one momentum bot, two years of NSE data</a:t>
-            </a:r>
-          </a:p>
-        </p:txBody>
-      </p:sp>
-      <p:sp>
-        <p:nvSpPr>
-          <p:cNvPr id="5" name="TextBox 4"/>
-          <p:cNvSpPr txBox="1"/>
-          <p:nvPr/>
-        </p:nvSpPr>
-        <p:spPr>
-          <a:xfrm>
-            <a:off x="548640" y="1371600"/>
-            <a:ext cx="11091672" cy="274320"/>
-          </a:xfrm>
-          <a:prstGeom prst="rect">
-            <a:avLst/>
-          </a:prstGeom>
-          <a:noFill/>
-        </p:spPr>
-        <p:txBody>
-          <a:bodyPr wrap="square" anchor="t" lIns="0" rIns="0" tIns="0" bIns="0">
-            <a:spAutoFit/>
-          </a:bodyPr>
-          <a:lstStyle/>
-          <a:p>
-            <a:pPr algn="l"/>
-            <a:r>
-              <a:rPr sz="1100" b="0">
-                <a:solidFill>
-                  <a:srgbClr val="1B2A41"/>
-                </a:solidFill>
-              </a:rPr>
-              <a:t>One NSE stock and one rule go in. A performance report comes out: CAGR, Sharpe ratio and max drawdown.</a:t>
-            </a:r>
-          </a:p>
-        </p:txBody>
-      </p:sp>
-      <p:sp>
-        <p:nvSpPr>
-          <p:cNvPr id="6" name="Rectangle 5"/>
-          <p:cNvSpPr/>
-          <p:nvPr/>
-        </p:nvSpPr>
-        <p:spPr>
-          <a:xfrm>
-            <a:off x="548640" y="1773936"/>
-            <a:ext cx="5760720" cy="2514600"/>
-          </a:xfrm>
-          <a:prstGeom prst="rect">
-            <a:avLst/>
-          </a:prstGeom>
-          <a:solidFill>
-            <a:srgbClr val="FFFFFF"/>
-          </a:solidFill>
-          <a:ln>
-            <a:noFill/>
-          </a:ln>
-          <a:effectLst/>
-        </p:spPr>
-        <p:style>
-          <a:lnRef idx="1">
-            <a:schemeClr val="accent1"/>
-          </a:lnRef>
-          <a:fillRef idx="3">
-            <a:schemeClr val="accent1"/>
-          </a:fillRef>
-          <a:effectRef idx="2">
-            <a:schemeClr val="accent1"/>
-          </a:effectRef>
-          <a:fontRef idx="minor">
-            <a:schemeClr val="lt1"/>
-          </a:fontRef>
-        </p:style>
-        <p:txBody>
-          <a:bodyPr rtlCol="0" anchor="ctr"/>
-          <a:lstStyle/>
-          <a:p>
-            <a:pPr algn="ctr"/>
-          </a:p>
-        </p:txBody>
-      </p:sp>
-      <p:sp>
-        <p:nvSpPr>
-          <p:cNvPr id="7" name="TextBox 6"/>
-          <p:cNvSpPr txBox="1"/>
-          <p:nvPr/>
-        </p:nvSpPr>
-        <p:spPr>
-          <a:xfrm>
-            <a:off x="804672" y="1938528"/>
-            <a:ext cx="5303520" cy="274320"/>
-          </a:xfrm>
-          <a:prstGeom prst="rect">
-            <a:avLst/>
-          </a:prstGeom>
-          <a:noFill/>
-        </p:spPr>
-        <p:txBody>
-          <a:bodyPr wrap="square" anchor="t" lIns="0" rIns="0" tIns="0" bIns="0">
-            <a:spAutoFit/>
-          </a:bodyPr>
-          <a:lstStyle/>
-          <a:p>
-            <a:pPr algn="l"/>
-            <a:r>
-              <a:rPr sz="1000" b="1">
-                <a:solidFill>
-                  <a:srgbClr val="3A5C9E"/>
-                </a:solidFill>
-              </a:rPr>
-              <a:t>THE BUILD</a:t>
-            </a:r>
-          </a:p>
-        </p:txBody>
-      </p:sp>
-      <p:sp>
-        <p:nvSpPr>
-          <p:cNvPr id="8" name="TextBox 7"/>
-          <p:cNvSpPr txBox="1"/>
-          <p:nvPr/>
-        </p:nvSpPr>
-        <p:spPr>
-          <a:xfrm>
-            <a:off x="804672" y="2267712"/>
-            <a:ext cx="320040" cy="365760"/>
-          </a:xfrm>
-          <a:prstGeom prst="rect">
-            <a:avLst/>
-          </a:prstGeom>
-          <a:noFill/>
-        </p:spPr>
-        <p:txBody>
-          <a:bodyPr wrap="square" anchor="t" lIns="0" rIns="0" tIns="0" bIns="0">
-            <a:spAutoFit/>
-          </a:bodyPr>
-          <a:lstStyle/>
-          <a:p>
-            <a:pPr algn="l"/>
-            <a:r>
-              <a:rPr sz="1400" b="1">
-                <a:solidFill>
-                  <a:srgbClr val="C9A227"/>
-                </a:solidFill>
-                <a:latin typeface="Georgia"/>
-              </a:rPr>
-              <a:t>1</a:t>
-            </a:r>
-          </a:p>
-        </p:txBody>
-      </p:sp>
-      <p:sp>
-        <p:nvSpPr>
-          <p:cNvPr id="9" name="TextBox 8"/>
-          <p:cNvSpPr txBox="1"/>
-          <p:nvPr/>
-        </p:nvSpPr>
-        <p:spPr>
-          <a:xfrm>
-            <a:off x="1207008" y="2286000"/>
-            <a:ext cx="4892040" cy="502920"/>
-          </a:xfrm>
-          <a:prstGeom prst="rect">
-            <a:avLst/>
-          </a:prstGeom>
-          <a:noFill/>
-        </p:spPr>
-        <p:txBody>
-          <a:bodyPr wrap="square" anchor="t" lIns="0" rIns="0" tIns="0" bIns="0">
-            <a:spAutoFit/>
-          </a:bodyPr>
-          <a:lstStyle/>
-          <a:p>
-            <a:pPr algn="l"/>
-            <a:r>
-              <a:rPr sz="1000" b="0">
-                <a:solidFill>
-                  <a:srgbClr val="1B2A41"/>
-                </a:solidFill>
-              </a:rPr>
-              <a:t>Pick one NSE stock and download two years of daily prices with yfinance.</a:t>
-            </a:r>
-          </a:p>
-        </p:txBody>
-      </p:sp>
-      <p:sp>
-        <p:nvSpPr>
-          <p:cNvPr id="10" name="TextBox 9"/>
-          <p:cNvSpPr txBox="1"/>
-          <p:nvPr/>
-        </p:nvSpPr>
-        <p:spPr>
-          <a:xfrm>
-            <a:off x="804672" y="2761488"/>
-            <a:ext cx="320040" cy="365760"/>
-          </a:xfrm>
-          <a:prstGeom prst="rect">
-            <a:avLst/>
-          </a:prstGeom>
-          <a:noFill/>
-        </p:spPr>
-        <p:txBody>
-          <a:bodyPr wrap="square" anchor="t" lIns="0" rIns="0" tIns="0" bIns="0">
-            <a:spAutoFit/>
-          </a:bodyPr>
-          <a:lstStyle/>
-          <a:p>
-            <a:pPr algn="l"/>
-            <a:r>
-              <a:rPr sz="1400" b="1">
-                <a:solidFill>
-                  <a:srgbClr val="C9A227"/>
-                </a:solidFill>
-                <a:latin typeface="Georgia"/>
-              </a:rPr>
-              <a:t>2</a:t>
-            </a:r>
-          </a:p>
-        </p:txBody>
-      </p:sp>
-      <p:sp>
-        <p:nvSpPr>
-          <p:cNvPr id="11" name="TextBox 10"/>
-          <p:cNvSpPr txBox="1"/>
-          <p:nvPr/>
-        </p:nvSpPr>
-        <p:spPr>
-          <a:xfrm>
-            <a:off x="1207008" y="2779776"/>
-            <a:ext cx="4892040" cy="502920"/>
-          </a:xfrm>
-          <a:prstGeom prst="rect">
-            <a:avLst/>
-          </a:prstGeom>
-          <a:noFill/>
-        </p:spPr>
-        <p:txBody>
-          <a:bodyPr wrap="square" anchor="t" lIns="0" rIns="0" tIns="0" bIns="0">
-            <a:spAutoFit/>
-          </a:bodyPr>
-          <a:lstStyle/>
-          <a:p>
-            <a:pPr algn="l"/>
-            <a:r>
-              <a:rPr sz="1000" b="0">
-                <a:solidFill>
-                  <a:srgbClr val="1B2A41"/>
-                </a:solidFill>
-              </a:rPr>
-              <a:t>Write the rule: buy when the 20-day average crosses above the 50-day average, sell when it crosses back.</a:t>
-            </a:r>
-          </a:p>
-        </p:txBody>
-      </p:sp>
-      <p:sp>
-        <p:nvSpPr>
-          <p:cNvPr id="12" name="TextBox 11"/>
-          <p:cNvSpPr txBox="1"/>
-          <p:nvPr/>
-        </p:nvSpPr>
-        <p:spPr>
-          <a:xfrm>
-            <a:off x="804672" y="3255264"/>
-            <a:ext cx="320040" cy="365760"/>
-          </a:xfrm>
-          <a:prstGeom prst="rect">
-            <a:avLst/>
-          </a:prstGeom>
-          <a:noFill/>
-        </p:spPr>
-        <p:txBody>
-          <a:bodyPr wrap="square" anchor="t" lIns="0" rIns="0" tIns="0" bIns="0">
-            <a:spAutoFit/>
-          </a:bodyPr>
-          <a:lstStyle/>
-          <a:p>
-            <a:pPr algn="l"/>
-            <a:r>
-              <a:rPr sz="1400" b="1">
-                <a:solidFill>
-                  <a:srgbClr val="C9A227"/>
-                </a:solidFill>
-                <a:latin typeface="Georgia"/>
-              </a:rPr>
-              <a:t>3</a:t>
-            </a:r>
-          </a:p>
-        </p:txBody>
-      </p:sp>
-      <p:sp>
-        <p:nvSpPr>
-          <p:cNvPr id="13" name="TextBox 12"/>
-          <p:cNvSpPr txBox="1"/>
-          <p:nvPr/>
-        </p:nvSpPr>
-        <p:spPr>
-          <a:xfrm>
-            <a:off x="1207008" y="3273552"/>
-            <a:ext cx="4892040" cy="502920"/>
-          </a:xfrm>
-          <a:prstGeom prst="rect">
-            <a:avLst/>
-          </a:prstGeom>
-          <a:noFill/>
-        </p:spPr>
-        <p:txBody>
-          <a:bodyPr wrap="square" anchor="t" lIns="0" rIns="0" tIns="0" bIns="0">
-            <a:spAutoFit/>
-          </a:bodyPr>
-          <a:lstStyle/>
-          <a:p>
-            <a:pPr algn="l"/>
-            <a:r>
-              <a:rPr sz="1000" b="0">
-                <a:solidFill>
-                  <a:srgbClr val="1B2A41"/>
-                </a:solidFill>
-              </a:rPr>
-              <a:t>Run it in Backtrader and read the report: CAGR, Sharpe, max drawdown, number of trades.</a:t>
-            </a:r>
-          </a:p>
-        </p:txBody>
-      </p:sp>
-      <p:sp>
-        <p:nvSpPr>
-          <p:cNvPr id="14" name="TextBox 13"/>
-          <p:cNvSpPr txBox="1"/>
-          <p:nvPr/>
-        </p:nvSpPr>
-        <p:spPr>
-          <a:xfrm>
-            <a:off x="804672" y="3749039"/>
-            <a:ext cx="320040" cy="365760"/>
-          </a:xfrm>
-          <a:prstGeom prst="rect">
-            <a:avLst/>
-          </a:prstGeom>
-          <a:noFill/>
-        </p:spPr>
-        <p:txBody>
-          <a:bodyPr wrap="square" anchor="t" lIns="0" rIns="0" tIns="0" bIns="0">
-            <a:spAutoFit/>
-          </a:bodyPr>
-          <a:lstStyle/>
-          <a:p>
-            <a:pPr algn="l"/>
-            <a:r>
-              <a:rPr sz="1400" b="1">
-                <a:solidFill>
-                  <a:srgbClr val="C9A227"/>
-                </a:solidFill>
-                <a:latin typeface="Georgia"/>
-              </a:rPr>
-              <a:t>4</a:t>
-            </a:r>
-          </a:p>
-        </p:txBody>
-      </p:sp>
-      <p:sp>
-        <p:nvSpPr>
-          <p:cNvPr id="15" name="TextBox 14"/>
-          <p:cNvSpPr txBox="1"/>
-          <p:nvPr/>
-        </p:nvSpPr>
-        <p:spPr>
-          <a:xfrm>
-            <a:off x="1207008" y="3767327"/>
-            <a:ext cx="4892040" cy="502920"/>
-          </a:xfrm>
-          <a:prstGeom prst="rect">
-            <a:avLst/>
-          </a:prstGeom>
-          <a:noFill/>
-        </p:spPr>
-        <p:txBody>
-          <a:bodyPr wrap="square" anchor="t" lIns="0" rIns="0" tIns="0" bIns="0">
-            <a:spAutoFit/>
-          </a:bodyPr>
-          <a:lstStyle/>
-          <a:p>
-            <a:pPr algn="l"/>
-            <a:r>
-              <a:rPr sz="1000" b="0">
-                <a:solidFill>
-                  <a:srgbClr val="1B2A41"/>
-                </a:solidFill>
-              </a:rPr>
-              <a:t>Add costs of 0.1% per trade. Read the report again and watch what changes.</a:t>
-            </a:r>
-          </a:p>
-        </p:txBody>
-      </p:sp>
-      <p:sp>
-        <p:nvSpPr>
-          <p:cNvPr id="16" name="Rectangle 15"/>
-          <p:cNvSpPr/>
-          <p:nvPr/>
-        </p:nvSpPr>
-        <p:spPr>
-          <a:xfrm>
-            <a:off x="548640" y="4434840"/>
-            <a:ext cx="5760720" cy="1005840"/>
-          </a:xfrm>
-          <a:prstGeom prst="rect">
-            <a:avLst/>
-          </a:prstGeom>
-          <a:solidFill>
-            <a:srgbClr val="FFFFFF"/>
-          </a:solidFill>
-          <a:ln>
-            <a:noFill/>
-          </a:ln>
-          <a:effectLst/>
-        </p:spPr>
-        <p:style>
-          <a:lnRef idx="1">
-            <a:schemeClr val="accent1"/>
-          </a:lnRef>
-          <a:fillRef idx="3">
-            <a:schemeClr val="accent1"/>
-          </a:fillRef>
-          <a:effectRef idx="2">
-            <a:schemeClr val="accent1"/>
-          </a:effectRef>
-          <a:fontRef idx="minor">
-            <a:schemeClr val="lt1"/>
-          </a:fontRef>
-        </p:style>
-        <p:txBody>
-          <a:bodyPr rtlCol="0" anchor="ctr"/>
-          <a:lstStyle/>
-          <a:p>
-            <a:pPr algn="ctr"/>
-          </a:p>
-        </p:txBody>
-      </p:sp>
-      <p:sp>
-        <p:nvSpPr>
-          <p:cNvPr id="17" name="Rectangle 16"/>
-          <p:cNvSpPr/>
-          <p:nvPr/>
-        </p:nvSpPr>
-        <p:spPr>
-          <a:xfrm>
-            <a:off x="548640" y="4434840"/>
-            <a:ext cx="64008" cy="1005840"/>
-          </a:xfrm>
-          <a:prstGeom prst="rect">
-            <a:avLst/>
-          </a:prstGeom>
-          <a:solidFill>
-            <a:srgbClr val="C9A227"/>
-          </a:solidFill>
-          <a:ln>
-            <a:noFill/>
-          </a:ln>
-          <a:effectLst/>
-        </p:spPr>
-        <p:style>
-          <a:lnRef idx="1">
-            <a:schemeClr val="accent1"/>
-          </a:lnRef>
-          <a:fillRef idx="3">
-            <a:schemeClr val="accent1"/>
-          </a:fillRef>
-          <a:effectRef idx="2">
-            <a:schemeClr val="accent1"/>
-          </a:effectRef>
-          <a:fontRef idx="minor">
-            <a:schemeClr val="lt1"/>
-          </a:fontRef>
-        </p:style>
-        <p:txBody>
-          <a:bodyPr rtlCol="0" anchor="ctr"/>
-          <a:lstStyle/>
-          <a:p>
-            <a:pPr algn="ctr"/>
-          </a:p>
-        </p:txBody>
-      </p:sp>
-      <p:sp>
-        <p:nvSpPr>
-          <p:cNvPr id="18" name="TextBox 17"/>
-          <p:cNvSpPr txBox="1"/>
-          <p:nvPr/>
-        </p:nvSpPr>
-        <p:spPr>
-          <a:xfrm>
-            <a:off x="822960" y="4544568"/>
-            <a:ext cx="5257800" cy="868680"/>
-          </a:xfrm>
-          <a:prstGeom prst="rect">
-            <a:avLst/>
-          </a:prstGeom>
-          <a:noFill/>
-        </p:spPr>
-        <p:txBody>
-          <a:bodyPr wrap="square" anchor="t" lIns="0" rIns="0" tIns="0" bIns="0">
-            <a:spAutoFit/>
-          </a:bodyPr>
-          <a:lstStyle/>
-          <a:p>
-            <a:pPr algn="l"/>
-            <a:r>
-              <a:rPr sz="1000" b="1">
-                <a:solidFill>
-                  <a:srgbClr val="8F7113"/>
-                </a:solidFill>
-              </a:rPr>
-              <a:t>TRY IT FREE AT HOME</a:t>
-            </a:r>
-          </a:p>
-          <a:p>
-            <a:pPr algn="l">
-              <a:spcBef>
-                <a:spcPts val="300"/>
-              </a:spcBef>
-            </a:pPr>
-            <a:r>
-              <a:rPr sz="1000" b="0">
-                <a:solidFill>
-                  <a:srgbClr val="1B2A41"/>
-                </a:solidFill>
-              </a:rPr>
-              <a:t>No API key is needed. Ask any free AI chat to write the Backtrader code for the rule above, then run it in Google Colab in your browser. tejasgjadhav.github.io/AIFINANCE</a:t>
-            </a:r>
-          </a:p>
-        </p:txBody>
-      </p:sp>
-      <p:sp>
-        <p:nvSpPr>
-          <p:cNvPr id="19" name="Rectangle 18"/>
-          <p:cNvSpPr/>
-          <p:nvPr/>
-        </p:nvSpPr>
-        <p:spPr>
-          <a:xfrm>
-            <a:off x="6492240" y="1773936"/>
-            <a:ext cx="5148072" cy="2514600"/>
-          </a:xfrm>
-          <a:prstGeom prst="rect">
-            <a:avLst/>
-          </a:prstGeom>
-          <a:solidFill>
-            <a:srgbClr val="FFFFFF"/>
-          </a:solidFill>
-          <a:ln>
-            <a:noFill/>
-          </a:ln>
-          <a:effectLst/>
-        </p:spPr>
-        <p:style>
-          <a:lnRef idx="1">
-            <a:schemeClr val="accent1"/>
-          </a:lnRef>
-          <a:fillRef idx="3">
-            <a:schemeClr val="accent1"/>
-          </a:fillRef>
-          <a:effectRef idx="2">
-            <a:schemeClr val="accent1"/>
-          </a:effectRef>
-          <a:fontRef idx="minor">
-            <a:schemeClr val="lt1"/>
-          </a:fontRef>
-        </p:style>
-        <p:txBody>
-          <a:bodyPr rtlCol="0" anchor="ctr"/>
-          <a:lstStyle/>
-          <a:p>
-            <a:pPr algn="ctr"/>
-          </a:p>
-        </p:txBody>
-      </p:sp>
-      <p:sp>
-        <p:nvSpPr>
-          <p:cNvPr id="20" name="TextBox 19"/>
-          <p:cNvSpPr txBox="1"/>
-          <p:nvPr/>
-        </p:nvSpPr>
-        <p:spPr>
-          <a:xfrm>
-            <a:off x="6748272" y="1938528"/>
-            <a:ext cx="4663440" cy="274320"/>
-          </a:xfrm>
-          <a:prstGeom prst="rect">
-            <a:avLst/>
-          </a:prstGeom>
-          <a:noFill/>
-        </p:spPr>
-        <p:txBody>
-          <a:bodyPr wrap="square" anchor="t" lIns="0" rIns="0" tIns="0" bIns="0">
-            <a:spAutoFit/>
-          </a:bodyPr>
-          <a:lstStyle/>
-          <a:p>
-            <a:pPr algn="l"/>
-            <a:r>
-              <a:rPr sz="1000" b="1">
-                <a:solidFill>
-                  <a:srgbClr val="3A5C9E"/>
-                </a:solidFill>
-              </a:rPr>
-              <a:t>THE CLASS RUN</a:t>
-            </a:r>
-          </a:p>
-        </p:txBody>
-      </p:sp>
-      <p:sp>
-        <p:nvSpPr>
-          <p:cNvPr id="21" name="TextBox 20"/>
-          <p:cNvSpPr txBox="1"/>
-          <p:nvPr/>
-        </p:nvSpPr>
-        <p:spPr>
-          <a:xfrm>
-            <a:off x="6748272" y="2267712"/>
-            <a:ext cx="4663440" cy="502920"/>
-          </a:xfrm>
-          <a:prstGeom prst="rect">
-            <a:avLst/>
-          </a:prstGeom>
-          <a:noFill/>
-        </p:spPr>
-        <p:txBody>
-          <a:bodyPr wrap="square" anchor="t" lIns="0" rIns="0" tIns="0" bIns="0">
-            <a:spAutoFit/>
-          </a:bodyPr>
-          <a:lstStyle/>
-          <a:p>
-            <a:pPr algn="l"/>
-            <a:r>
-              <a:rPr sz="1000" b="1">
-                <a:solidFill>
-                  <a:srgbClr val="C9A227"/>
-                </a:solidFill>
-              </a:rPr>
-              <a:t>▪  </a:t>
-            </a:r>
-            <a:r>
-              <a:rPr sz="1000" b="0">
-                <a:solidFill>
-                  <a:srgbClr val="1B2A41"/>
-                </a:solidFill>
-              </a:rPr>
-              <a:t>Instructor demo: Claude Code writes and runs the bot from one English brief</a:t>
-            </a:r>
-          </a:p>
-        </p:txBody>
-      </p:sp>
-      <p:sp>
-        <p:nvSpPr>
-          <p:cNvPr id="22" name="TextBox 21"/>
-          <p:cNvSpPr txBox="1"/>
-          <p:nvPr/>
-        </p:nvSpPr>
-        <p:spPr>
-          <a:xfrm>
-            <a:off x="6748272" y="2724912"/>
-            <a:ext cx="4663440" cy="502920"/>
-          </a:xfrm>
-          <a:prstGeom prst="rect">
-            <a:avLst/>
-          </a:prstGeom>
-          <a:noFill/>
-        </p:spPr>
-        <p:txBody>
-          <a:bodyPr wrap="square" anchor="t" lIns="0" rIns="0" tIns="0" bIns="0">
-            <a:spAutoFit/>
-          </a:bodyPr>
-          <a:lstStyle/>
-          <a:p>
-            <a:pPr algn="l"/>
-            <a:r>
-              <a:rPr sz="1000" b="1">
-                <a:solidFill>
-                  <a:srgbClr val="C9A227"/>
-                </a:solidFill>
-              </a:rPr>
-              <a:t>▪  </a:t>
-            </a:r>
-            <a:r>
-              <a:rPr sz="1000" b="0">
-                <a:solidFill>
-                  <a:srgbClr val="1B2A41"/>
-                </a:solidFill>
-              </a:rPr>
-              <a:t>The class picks the stock on the day</a:t>
-            </a:r>
-          </a:p>
-        </p:txBody>
-      </p:sp>
-      <p:sp>
-        <p:nvSpPr>
-          <p:cNvPr id="23" name="TextBox 22"/>
-          <p:cNvSpPr txBox="1"/>
-          <p:nvPr/>
-        </p:nvSpPr>
-        <p:spPr>
-          <a:xfrm>
-            <a:off x="6748272" y="3182112"/>
-            <a:ext cx="4663440" cy="502920"/>
-          </a:xfrm>
-          <a:prstGeom prst="rect">
-            <a:avLst/>
-          </a:prstGeom>
-          <a:noFill/>
-        </p:spPr>
-        <p:txBody>
-          <a:bodyPr wrap="square" anchor="t" lIns="0" rIns="0" tIns="0" bIns="0">
-            <a:spAutoFit/>
-          </a:bodyPr>
-          <a:lstStyle/>
-          <a:p>
-            <a:pPr algn="l"/>
-            <a:r>
-              <a:rPr sz="1000" b="1">
-                <a:solidFill>
-                  <a:srgbClr val="C9A227"/>
-                </a:solidFill>
-              </a:rPr>
-              <a:t>▪  </a:t>
-            </a:r>
-            <a:r>
-              <a:rPr sz="1000" b="0">
-                <a:solidFill>
-                  <a:srgbClr val="1B2A41"/>
-                </a:solidFill>
-              </a:rPr>
-              <a:t>We read the second year on its own: that is the out-of-sample test</a:t>
-            </a:r>
-          </a:p>
-        </p:txBody>
-      </p:sp>
-      <p:sp>
-        <p:nvSpPr>
-          <p:cNvPr id="24" name="TextBox 23"/>
-          <p:cNvSpPr txBox="1"/>
-          <p:nvPr/>
-        </p:nvSpPr>
-        <p:spPr>
-          <a:xfrm>
-            <a:off x="6748272" y="3639312"/>
-            <a:ext cx="4663440" cy="502920"/>
-          </a:xfrm>
-          <a:prstGeom prst="rect">
-            <a:avLst/>
-          </a:prstGeom>
-          <a:noFill/>
-        </p:spPr>
-        <p:txBody>
-          <a:bodyPr wrap="square" anchor="t" lIns="0" rIns="0" tIns="0" bIns="0">
-            <a:spAutoFit/>
-          </a:bodyPr>
-          <a:lstStyle/>
-          <a:p>
-            <a:pPr algn="l"/>
-            <a:r>
-              <a:rPr sz="1000" b="1">
-                <a:solidFill>
-                  <a:srgbClr val="C9A227"/>
-                </a:solidFill>
-              </a:rPr>
-              <a:t>▪  </a:t>
-            </a:r>
-            <a:r>
-              <a:rPr sz="1000" b="0">
-                <a:solidFill>
-                  <a:srgbClr val="1B2A41"/>
-                </a:solidFill>
-              </a:rPr>
-              <a:t>Bonus signal: a news headline scored positive or negative by an AI chat</a:t>
-            </a:r>
-          </a:p>
-        </p:txBody>
-      </p:sp>
-      <p:sp>
-        <p:nvSpPr>
-          <p:cNvPr id="25" name="Rectangle 24"/>
-          <p:cNvSpPr/>
-          <p:nvPr/>
-        </p:nvSpPr>
-        <p:spPr>
-          <a:xfrm>
-            <a:off x="6492240" y="4434840"/>
-            <a:ext cx="5148072" cy="1005840"/>
-          </a:xfrm>
-          <a:prstGeom prst="rect">
-            <a:avLst/>
-          </a:prstGeom>
-          <a:solidFill>
-            <a:srgbClr val="FFFFFF"/>
-          </a:solidFill>
-          <a:ln>
-            <a:noFill/>
-          </a:ln>
-          <a:effectLst/>
-        </p:spPr>
-        <p:style>
-          <a:lnRef idx="1">
-            <a:schemeClr val="accent1"/>
-          </a:lnRef>
-          <a:fillRef idx="3">
-            <a:schemeClr val="accent1"/>
-          </a:fillRef>
-          <a:effectRef idx="2">
-            <a:schemeClr val="accent1"/>
-          </a:effectRef>
-          <a:fontRef idx="minor">
-            <a:schemeClr val="lt1"/>
-          </a:fontRef>
-        </p:style>
-        <p:txBody>
-          <a:bodyPr rtlCol="0" anchor="ctr"/>
-          <a:lstStyle/>
-          <a:p>
-            <a:pPr algn="ctr"/>
-          </a:p>
-        </p:txBody>
-      </p:sp>
-      <p:sp>
-        <p:nvSpPr>
-          <p:cNvPr id="26" name="Rectangle 25"/>
-          <p:cNvSpPr/>
-          <p:nvPr/>
-        </p:nvSpPr>
-        <p:spPr>
-          <a:xfrm>
-            <a:off x="6492240" y="4434840"/>
-            <a:ext cx="64008" cy="1005840"/>
-          </a:xfrm>
-          <a:prstGeom prst="rect">
-            <a:avLst/>
-          </a:prstGeom>
-          <a:solidFill>
-            <a:srgbClr val="C9A227"/>
-          </a:solidFill>
-          <a:ln>
-            <a:noFill/>
-          </a:ln>
-          <a:effectLst/>
-        </p:spPr>
-        <p:style>
-          <a:lnRef idx="1">
-            <a:schemeClr val="accent1"/>
-          </a:lnRef>
-          <a:fillRef idx="3">
-            <a:schemeClr val="accent1"/>
-          </a:fillRef>
-          <a:effectRef idx="2">
-            <a:schemeClr val="accent1"/>
-          </a:effectRef>
-          <a:fontRef idx="minor">
-            <a:schemeClr val="lt1"/>
-          </a:fontRef>
-        </p:style>
-        <p:txBody>
-          <a:bodyPr rtlCol="0" anchor="ctr"/>
-          <a:lstStyle/>
-          <a:p>
-            <a:pPr algn="ctr"/>
-          </a:p>
-        </p:txBody>
-      </p:sp>
-      <p:sp>
-        <p:nvSpPr>
-          <p:cNvPr id="27" name="TextBox 26"/>
-          <p:cNvSpPr txBox="1"/>
-          <p:nvPr/>
-        </p:nvSpPr>
-        <p:spPr>
-          <a:xfrm>
-            <a:off x="6766560" y="4544568"/>
-            <a:ext cx="4617720" cy="868680"/>
-          </a:xfrm>
-          <a:prstGeom prst="rect">
-            <a:avLst/>
-          </a:prstGeom>
-          <a:noFill/>
-        </p:spPr>
-        <p:txBody>
-          <a:bodyPr wrap="square" anchor="t" lIns="0" rIns="0" tIns="0" bIns="0">
-            <a:spAutoFit/>
-          </a:bodyPr>
-          <a:lstStyle/>
-          <a:p>
-            <a:pPr algn="l"/>
-            <a:r>
-              <a:rPr sz="1000" b="1">
-                <a:solidFill>
-                  <a:srgbClr val="8F7113"/>
-                </a:solidFill>
-              </a:rPr>
-              <a:t>PEER REVIEW · THE SCORE</a:t>
-            </a:r>
-          </a:p>
-          <a:p>
-            <a:pPr algn="l">
-              <a:spcBef>
-                <a:spcPts val="300"/>
-              </a:spcBef>
-            </a:pPr>
-            <a:r>
-              <a:rPr sz="1000" b="0">
-                <a:solidFill>
-                  <a:srgbClr val="1B2A41"/>
-                </a:solidFill>
-              </a:rPr>
-              <a:t>Swap reports with the next group and score three things: costs are included, the second year is shown on its own, and the drawdown is one you could sit through.</a:t>
-            </a:r>
-          </a:p>
-        </p:txBody>
-      </p:sp>
-      <p:sp>
-        <p:nvSpPr>
-          <p:cNvPr id="28" name="TextBox 27"/>
-          <p:cNvSpPr txBox="1"/>
-          <p:nvPr/>
-        </p:nvSpPr>
-        <p:spPr>
-          <a:xfrm>
-            <a:off x="548640" y="5559552"/>
-            <a:ext cx="11091672" cy="201168"/>
-          </a:xfrm>
-          <a:prstGeom prst="rect">
-            <a:avLst/>
-          </a:prstGeom>
-          <a:noFill/>
-        </p:spPr>
-        <p:txBody>
-          <a:bodyPr wrap="square" anchor="t" lIns="0" rIns="0" tIns="0" bIns="0">
-            <a:spAutoFit/>
-          </a:bodyPr>
-          <a:lstStyle/>
-          <a:p>
-            <a:pPr algn="l"/>
-            <a:r>
-              <a:rPr sz="800" b="1">
-                <a:solidFill>
-                  <a:srgbClr val="8F7113"/>
-                </a:solidFill>
-              </a:rPr>
-              <a:t>READING  </a:t>
-            </a:r>
-            <a:r>
-              <a:rPr sz="800" b="0">
-                <a:solidFill>
-                  <a:srgbClr val="5D6B7E"/>
-                </a:solidFill>
-              </a:rPr>
-              <a:t>Chan (2013) Quantitative Trading, ch. 1–3  ·  Hilpisch (2020) ch. 7  ·  SEBI circular on algorithmic trading (2012)  ·  Backtrader, yfinance and QuantLib docs</a:t>
-            </a:r>
-          </a:p>
-        </p:txBody>
-      </p:sp>
-      <p:sp>
-        <p:nvSpPr>
-          <p:cNvPr id="29" name="Rectangle 28"/>
-          <p:cNvSpPr/>
-          <p:nvPr/>
-        </p:nvSpPr>
-        <p:spPr>
-          <a:xfrm>
-            <a:off x="548640" y="5760720"/>
-            <a:ext cx="11091672" cy="603504"/>
-          </a:xfrm>
-          <a:prstGeom prst="rect">
-            <a:avLst/>
-          </a:prstGeom>
-          <a:solidFill>
-            <a:srgbClr val="0F2145"/>
-          </a:solidFill>
-          <a:ln>
-            <a:noFill/>
-          </a:ln>
-          <a:effectLst/>
-        </p:spPr>
-        <p:style>
-          <a:lnRef idx="1">
-            <a:schemeClr val="accent1"/>
-          </a:lnRef>
-          <a:fillRef idx="3">
-            <a:schemeClr val="accent1"/>
-          </a:fillRef>
-          <a:effectRef idx="2">
-            <a:schemeClr val="accent1"/>
-          </a:effectRef>
-          <a:fontRef idx="minor">
-            <a:schemeClr val="lt1"/>
-          </a:fontRef>
-        </p:style>
-        <p:txBody>
-          <a:bodyPr rtlCol="0" anchor="ctr"/>
-          <a:lstStyle/>
-          <a:p>
-            <a:pPr algn="ctr"/>
-          </a:p>
-        </p:txBody>
-      </p:sp>
-      <p:sp>
-        <p:nvSpPr>
-          <p:cNvPr id="30" name="Rectangle 29"/>
-          <p:cNvSpPr/>
-          <p:nvPr/>
-        </p:nvSpPr>
-        <p:spPr>
-          <a:xfrm>
-            <a:off x="548640" y="5760720"/>
-            <a:ext cx="64008" cy="603504"/>
-          </a:xfrm>
-          <a:prstGeom prst="rect">
-            <a:avLst/>
-          </a:prstGeom>
-          <a:solidFill>
-            <a:srgbClr val="C9A227"/>
-          </a:solidFill>
-          <a:ln>
-            <a:noFill/>
-          </a:ln>
-          <a:effectLst/>
-        </p:spPr>
-        <p:style>
-          <a:lnRef idx="1">
-            <a:schemeClr val="accent1"/>
-          </a:lnRef>
-          <a:fillRef idx="3">
-            <a:schemeClr val="accent1"/>
-          </a:fillRef>
-          <a:effectRef idx="2">
-            <a:schemeClr val="accent1"/>
-          </a:effectRef>
-          <a:fontRef idx="minor">
-            <a:schemeClr val="lt1"/>
-          </a:fontRef>
-        </p:style>
-        <p:txBody>
-          <a:bodyPr rtlCol="0" anchor="ctr"/>
-          <a:lstStyle/>
-          <a:p>
-            <a:pPr algn="ctr"/>
-          </a:p>
-        </p:txBody>
-      </p:sp>
-      <p:sp>
-        <p:nvSpPr>
-          <p:cNvPr id="31" name="TextBox 30"/>
-          <p:cNvSpPr txBox="1"/>
-          <p:nvPr/>
-        </p:nvSpPr>
-        <p:spPr>
-          <a:xfrm>
-            <a:off x="822960" y="5760720"/>
-            <a:ext cx="10543032" cy="603504"/>
-          </a:xfrm>
-          <a:prstGeom prst="rect">
-            <a:avLst/>
-          </a:prstGeom>
-          <a:noFill/>
-        </p:spPr>
-        <p:txBody>
-          <a:bodyPr wrap="square" anchor="ctr" lIns="0" rIns="0" tIns="0" bIns="0">
-            <a:spAutoFit/>
-          </a:bodyPr>
-          <a:lstStyle/>
-          <a:p>
-            <a:pPr algn="l"/>
-            <a:r>
-              <a:rPr sz="1200" b="1">
-                <a:solidFill>
-                  <a:srgbClr val="C9A227"/>
-                </a:solidFill>
-              </a:rPr>
-              <a:t>What you have at the end:  </a:t>
-            </a:r>
-            <a:r>
-              <a:rPr sz="1200" b="0">
-                <a:solidFill>
-                  <a:srgbClr val="FFFFFF"/>
-                </a:solidFill>
-              </a:rPr>
-              <a:t>a bot you wrote as one sentence, and a report that tells you whether to trust it.</a:t>
-            </a:r>
-          </a:p>
-        </p:txBody>
-      </p:sp>
-      <p:sp>
-        <p:nvSpPr>
-          <p:cNvPr id="32" name="TextBox 31"/>
-          <p:cNvSpPr txBox="1"/>
-          <p:nvPr/>
-        </p:nvSpPr>
-        <p:spPr>
-          <a:xfrm>
-            <a:off x="548640" y="6473952"/>
-            <a:ext cx="7315200" cy="228600"/>
-          </a:xfrm>
-          <a:prstGeom prst="rect">
-            <a:avLst/>
-          </a:prstGeom>
-          <a:noFill/>
-        </p:spPr>
-        <p:txBody>
-          <a:bodyPr wrap="square" anchor="t" lIns="0" rIns="0" tIns="0" bIns="0">
-            <a:spAutoFit/>
-          </a:bodyPr>
-          <a:lstStyle/>
-          <a:p>
-            <a:pPr algn="l"/>
-            <a:r>
-              <a:rPr sz="800" b="0">
-                <a:solidFill>
-                  <a:srgbClr val="5D6B7E"/>
-                </a:solidFill>
-              </a:rPr>
-              <a:t>ISBMS · PGDM 2025–27 · AGENTIC AI &amp; ADVANCED ANALYTICS IN FINANCE</a:t>
-            </a:r>
-          </a:p>
-        </p:txBody>
-      </p:sp>
-      <p:sp>
-        <p:nvSpPr>
-          <p:cNvPr id="33" name="TextBox 32"/>
-          <p:cNvSpPr txBox="1"/>
-          <p:nvPr/>
-        </p:nvSpPr>
-        <p:spPr>
-          <a:xfrm>
-            <a:off x="9262872" y="6473952"/>
-            <a:ext cx="2377440" cy="228600"/>
-          </a:xfrm>
-          <a:prstGeom prst="rect">
-            <a:avLst/>
-          </a:prstGeom>
-          <a:noFill/>
-        </p:spPr>
-        <p:txBody>
-          <a:bodyPr wrap="square" anchor="t" lIns="0" rIns="0" tIns="0" bIns="0">
-            <a:spAutoFit/>
-          </a:bodyPr>
-          <a:lstStyle/>
-          <a:p>
-            <a:pPr algn="r"/>
-            <a:r>
-              <a:rPr sz="800" b="0">
-                <a:solidFill>
-                  <a:srgbClr val="5D6B7E"/>
-                </a:solidFill>
-              </a:rPr>
-              <a:t>MODULE 4  ·  09</a:t>
             </a:r>
           </a:p>
         </p:txBody>
